--- a/vault/courses/mcp-from-first-principles-to-production/ch04-slides.pptx
+++ b/vault/courses/mcp-from-first-principles-to-production/ch04-slides.pptx
@@ -3094,14 +3094,6 @@
 <file path=ppt/slides/slide1.xml><?xml version="1.0" encoding="utf-8"?>
 <p:sld xmlns:a="http://schemas.openxmlformats.org/drawingml/2006/main" xmlns:p="http://schemas.openxmlformats.org/presentationml/2006/main" xmlns:r="http://schemas.openxmlformats.org/officeDocument/2006/relationships">
   <p:cSld>
-    <p:bg>
-      <p:bgPr>
-        <a:solidFill>
-          <a:srgbClr val="18181B"/>
-        </a:solidFill>
-        <a:effectLst/>
-      </p:bgPr>
-    </p:bg>
     <p:spTree>
       <p:nvGrpSpPr>
         <p:cNvPr id="1" name=""/>
@@ -3111,48 +3103,168 @@
       <p:grpSpPr/>
       <p:sp>
         <p:nvSpPr>
-          <p:cNvPr id="2" name="TextBox 1"/>
-          <p:cNvSpPr txBox="1"/>
-          <p:nvPr/>
-        </p:nvSpPr>
-        <p:spPr>
-          <a:xfrm>
-            <a:off x="822960" y="1920240"/>
-            <a:ext cx="10607040" cy="1188720"/>
-          </a:xfrm>
-          <a:prstGeom prst="rect">
-            <a:avLst/>
-          </a:prstGeom>
-          <a:noFill/>
-        </p:spPr>
-        <p:txBody>
-          <a:bodyPr wrap="square">
-            <a:spAutoFit/>
-          </a:bodyPr>
+          <p:cNvPr id="2" name="Rectangle 1"/>
+          <p:cNvSpPr/>
+          <p:nvPr/>
+        </p:nvSpPr>
+        <p:spPr>
+          <a:xfrm>
+            <a:off x="0" y="0"/>
+            <a:ext cx="12191695" cy="6858000"/>
+          </a:xfrm>
+          <a:prstGeom prst="rect">
+            <a:avLst/>
+          </a:prstGeom>
+          <a:solidFill>
+            <a:srgbClr val="18181B"/>
+          </a:solidFill>
+          <a:ln>
+            <a:noFill/>
+          </a:ln>
+        </p:spPr>
+        <p:style>
+          <a:lnRef idx="1">
+            <a:schemeClr val="accent1"/>
+          </a:lnRef>
+          <a:fillRef idx="3">
+            <a:schemeClr val="accent1"/>
+          </a:fillRef>
+          <a:effectRef idx="2">
+            <a:schemeClr val="accent1"/>
+          </a:effectRef>
+          <a:fontRef idx="minor">
+            <a:schemeClr val="lt1"/>
+          </a:fontRef>
+        </p:style>
+        <p:txBody>
+          <a:bodyPr rtlCol="0" anchor="ctr"/>
           <a:lstStyle/>
           <a:p>
             <a:pPr algn="ctr"/>
-            <a:r>
-              <a:rPr sz="3400" b="1">
+          </a:p>
+        </p:txBody>
+      </p:sp>
+      <p:sp>
+        <p:nvSpPr>
+          <p:cNvPr id="3" name="Rectangle 2"/>
+          <p:cNvSpPr/>
+          <p:nvPr/>
+        </p:nvSpPr>
+        <p:spPr>
+          <a:xfrm>
+            <a:off x="0" y="0"/>
+            <a:ext cx="12191695" cy="54864"/>
+          </a:xfrm>
+          <a:prstGeom prst="rect">
+            <a:avLst/>
+          </a:prstGeom>
+          <a:solidFill>
+            <a:srgbClr val="6366F1"/>
+          </a:solidFill>
+          <a:ln>
+            <a:noFill/>
+          </a:ln>
+        </p:spPr>
+        <p:style>
+          <a:lnRef idx="1">
+            <a:schemeClr val="accent1"/>
+          </a:lnRef>
+          <a:fillRef idx="3">
+            <a:schemeClr val="accent1"/>
+          </a:fillRef>
+          <a:effectRef idx="2">
+            <a:schemeClr val="accent1"/>
+          </a:effectRef>
+          <a:fontRef idx="minor">
+            <a:schemeClr val="lt1"/>
+          </a:fontRef>
+        </p:style>
+        <p:txBody>
+          <a:bodyPr rtlCol="0" anchor="ctr"/>
+          <a:lstStyle/>
+          <a:p>
+            <a:pPr algn="ctr"/>
+          </a:p>
+        </p:txBody>
+      </p:sp>
+      <p:sp>
+        <p:nvSpPr>
+          <p:cNvPr id="4" name="TextBox 3"/>
+          <p:cNvSpPr txBox="1"/>
+          <p:nvPr/>
+        </p:nvSpPr>
+        <p:spPr>
+          <a:xfrm>
+            <a:off x="914400" y="1463040"/>
+            <a:ext cx="10332720" cy="457200"/>
+          </a:xfrm>
+          <a:prstGeom prst="rect">
+            <a:avLst/>
+          </a:prstGeom>
+          <a:noFill/>
+        </p:spPr>
+        <p:txBody>
+          <a:bodyPr wrap="square">
+            <a:spAutoFit/>
+          </a:bodyPr>
+          <a:lstStyle/>
+          <a:p>
+            <a:pPr algn="ctr"/>
+            <a:r>
+              <a:rPr sz="1600" b="1">
+                <a:solidFill>
+                  <a:srgbClr val="A1A1AA"/>
+                </a:solidFill>
+              </a:rPr>
+              <a:t>CHAPTER 4</a:t>
+            </a:r>
+          </a:p>
+        </p:txBody>
+      </p:sp>
+      <p:sp>
+        <p:nvSpPr>
+          <p:cNvPr id="5" name="TextBox 4"/>
+          <p:cNvSpPr txBox="1"/>
+          <p:nvPr/>
+        </p:nvSpPr>
+        <p:spPr>
+          <a:xfrm>
+            <a:off x="914400" y="2103120"/>
+            <a:ext cx="10332720" cy="2011680"/>
+          </a:xfrm>
+          <a:prstGeom prst="rect">
+            <a:avLst/>
+          </a:prstGeom>
+          <a:noFill/>
+        </p:spPr>
+        <p:txBody>
+          <a:bodyPr wrap="square">
+            <a:spAutoFit/>
+          </a:bodyPr>
+          <a:lstStyle/>
+          <a:p>
+            <a:pPr algn="ctr"/>
+            <a:r>
+              <a:rPr sz="3600" b="1">
                 <a:solidFill>
                   <a:srgbClr val="FFFFFF"/>
                 </a:solidFill>
               </a:rPr>
-              <a:t>OAuth 2.1 + DPoP — production auth for MCP servers</a:t>
-            </a:r>
-          </a:p>
-        </p:txBody>
-      </p:sp>
-      <p:sp>
-        <p:nvSpPr>
-          <p:cNvPr id="3" name="TextBox 2"/>
-          <p:cNvSpPr txBox="1"/>
-          <p:nvPr/>
-        </p:nvSpPr>
-        <p:spPr>
-          <a:xfrm>
-            <a:off x="1097280" y="3383280"/>
-            <a:ext cx="10058400" cy="457200"/>
+              <a:t>OAuth 2.1 + DPoP—production auth for MCP servers</a:t>
+            </a:r>
+          </a:p>
+        </p:txBody>
+      </p:sp>
+      <p:sp>
+        <p:nvSpPr>
+          <p:cNvPr id="6" name="TextBox 5"/>
+          <p:cNvSpPr txBox="1"/>
+          <p:nvPr/>
+        </p:nvSpPr>
+        <p:spPr>
+          <a:xfrm>
+            <a:off x="914400" y="4389120"/>
+            <a:ext cx="10332720" cy="457200"/>
           </a:xfrm>
           <a:prstGeom prst="rect">
             <a:avLst/>
@@ -3167,26 +3279,26 @@
           <a:p>
             <a:pPr algn="ctr"/>
             <a:r>
-              <a:rPr sz="1600" b="0">
+              <a:rPr sz="1400" b="0">
                 <a:solidFill>
                   <a:srgbClr val="A1A1AA"/>
                 </a:solidFill>
               </a:rPr>
-              <a:t>Chapter 4 · mcp from first principles to production</a:t>
-            </a:r>
-          </a:p>
-        </p:txBody>
-      </p:sp>
-      <p:sp>
-        <p:nvSpPr>
-          <p:cNvPr id="4" name="TextBox 3"/>
-          <p:cNvSpPr txBox="1"/>
-          <p:nvPr/>
-        </p:nvSpPr>
-        <p:spPr>
-          <a:xfrm>
-            <a:off x="731520" y="6263640"/>
-            <a:ext cx="10698480" cy="320040"/>
+              <a:t>MCP From First Principles to Production — Koenig AI Academy</a:t>
+            </a:r>
+          </a:p>
+        </p:txBody>
+      </p:sp>
+      <p:sp>
+        <p:nvSpPr>
+          <p:cNvPr id="7" name="TextBox 6"/>
+          <p:cNvSpPr txBox="1"/>
+          <p:nvPr/>
+        </p:nvSpPr>
+        <p:spPr>
+          <a:xfrm>
+            <a:off x="457200" y="6492240"/>
+            <a:ext cx="11247120" cy="320040"/>
           </a:xfrm>
           <a:prstGeom prst="rect">
             <a:avLst/>
@@ -3222,14 +3334,6 @@
 <file path=ppt/slides/slide10.xml><?xml version="1.0" encoding="utf-8"?>
 <p:sld xmlns:a="http://schemas.openxmlformats.org/drawingml/2006/main" xmlns:p="http://schemas.openxmlformats.org/presentationml/2006/main" xmlns:r="http://schemas.openxmlformats.org/officeDocument/2006/relationships">
   <p:cSld>
-    <p:bg>
-      <p:bgPr>
-        <a:solidFill>
-          <a:srgbClr val="18181B"/>
-        </a:solidFill>
-        <a:effectLst/>
-      </p:bgPr>
-    </p:bg>
     <p:spTree>
       <p:nvGrpSpPr>
         <p:cNvPr id="1" name=""/>
@@ -3239,35 +3343,44 @@
       <p:grpSpPr/>
       <p:sp>
         <p:nvSpPr>
-          <p:cNvPr id="2" name="TextBox 1"/>
-          <p:cNvSpPr txBox="1"/>
-          <p:nvPr/>
-        </p:nvSpPr>
-        <p:spPr>
-          <a:xfrm>
-            <a:off x="731520" y="411480"/>
-            <a:ext cx="10789920" cy="822960"/>
-          </a:xfrm>
-          <a:prstGeom prst="rect">
-            <a:avLst/>
-          </a:prstGeom>
-          <a:noFill/>
-        </p:spPr>
-        <p:txBody>
-          <a:bodyPr wrap="square">
-            <a:spAutoFit/>
-          </a:bodyPr>
-          <a:lstStyle/>
-          <a:p>
-            <a:pPr algn="l"/>
-            <a:r>
-              <a:rPr sz="2600" b="1">
-                <a:solidFill>
-                  <a:srgbClr val="FFFFFF"/>
-                </a:solidFill>
-              </a:rPr>
-              <a:t>OAuth 2.1: what changed and why it matters (5)</a:t>
-            </a:r>
+          <p:cNvPr id="2" name="Rectangle 1"/>
+          <p:cNvSpPr/>
+          <p:nvPr/>
+        </p:nvSpPr>
+        <p:spPr>
+          <a:xfrm>
+            <a:off x="0" y="0"/>
+            <a:ext cx="12191695" cy="6858000"/>
+          </a:xfrm>
+          <a:prstGeom prst="rect">
+            <a:avLst/>
+          </a:prstGeom>
+          <a:solidFill>
+            <a:srgbClr val="18181B"/>
+          </a:solidFill>
+          <a:ln>
+            <a:noFill/>
+          </a:ln>
+        </p:spPr>
+        <p:style>
+          <a:lnRef idx="1">
+            <a:schemeClr val="accent1"/>
+          </a:lnRef>
+          <a:fillRef idx="3">
+            <a:schemeClr val="accent1"/>
+          </a:fillRef>
+          <a:effectRef idx="2">
+            <a:schemeClr val="accent1"/>
+          </a:effectRef>
+          <a:fontRef idx="minor">
+            <a:schemeClr val="lt1"/>
+          </a:fontRef>
+        </p:style>
+        <p:txBody>
+          <a:bodyPr rtlCol="0" anchor="ctr"/>
+          <a:lstStyle/>
+          <a:p>
+            <a:pPr algn="ctr"/>
           </a:p>
         </p:txBody>
       </p:sp>
@@ -3279,8 +3392,85 @@
         </p:nvSpPr>
         <p:spPr>
           <a:xfrm>
-            <a:off x="731520" y="1325880"/>
-            <a:ext cx="10789920" cy="27432"/>
+            <a:off x="0" y="0"/>
+            <a:ext cx="12191695" cy="54864"/>
+          </a:xfrm>
+          <a:prstGeom prst="rect">
+            <a:avLst/>
+          </a:prstGeom>
+          <a:solidFill>
+            <a:srgbClr val="6366F1"/>
+          </a:solidFill>
+          <a:ln>
+            <a:noFill/>
+          </a:ln>
+        </p:spPr>
+        <p:style>
+          <a:lnRef idx="1">
+            <a:schemeClr val="accent1"/>
+          </a:lnRef>
+          <a:fillRef idx="3">
+            <a:schemeClr val="accent1"/>
+          </a:fillRef>
+          <a:effectRef idx="2">
+            <a:schemeClr val="accent1"/>
+          </a:effectRef>
+          <a:fontRef idx="minor">
+            <a:schemeClr val="lt1"/>
+          </a:fontRef>
+        </p:style>
+        <p:txBody>
+          <a:bodyPr rtlCol="0" anchor="ctr"/>
+          <a:lstStyle/>
+          <a:p>
+            <a:pPr algn="ctr"/>
+          </a:p>
+        </p:txBody>
+      </p:sp>
+      <p:sp>
+        <p:nvSpPr>
+          <p:cNvPr id="4" name="TextBox 3"/>
+          <p:cNvSpPr txBox="1"/>
+          <p:nvPr/>
+        </p:nvSpPr>
+        <p:spPr>
+          <a:xfrm>
+            <a:off x="457200" y="164592"/>
+            <a:ext cx="11247120" cy="868680"/>
+          </a:xfrm>
+          <a:prstGeom prst="rect">
+            <a:avLst/>
+          </a:prstGeom>
+          <a:noFill/>
+        </p:spPr>
+        <p:txBody>
+          <a:bodyPr wrap="square">
+            <a:spAutoFit/>
+          </a:bodyPr>
+          <a:lstStyle/>
+          <a:p>
+            <a:pPr algn="l"/>
+            <a:r>
+              <a:rPr sz="2800" b="1">
+                <a:solidFill>
+                  <a:srgbClr val="FFFFFF"/>
+                </a:solidFill>
+              </a:rPr>
+              <a:t>Implementing DPoP Validation — Key Code Points</a:t>
+            </a:r>
+          </a:p>
+        </p:txBody>
+      </p:sp>
+      <p:sp>
+        <p:nvSpPr>
+          <p:cNvPr id="5" name="Rectangle 4"/>
+          <p:cNvSpPr/>
+          <p:nvPr/>
+        </p:nvSpPr>
+        <p:spPr>
+          <a:xfrm>
+            <a:off x="457200" y="1143000"/>
+            <a:ext cx="11247120" cy="27432"/>
           </a:xfrm>
           <a:prstGeom prst="rect">
             <a:avLst/>
@@ -3316,14 +3506,14 @@
       </p:sp>
       <p:sp>
         <p:nvSpPr>
-          <p:cNvPr id="4" name="TextBox 3"/>
-          <p:cNvSpPr txBox="1"/>
-          <p:nvPr/>
-        </p:nvSpPr>
-        <p:spPr>
-          <a:xfrm>
-            <a:off x="868680" y="1600200"/>
-            <a:ext cx="10515600" cy="1005840"/>
+          <p:cNvPr id="6" name="TextBox 5"/>
+          <p:cNvSpPr txBox="1"/>
+          <p:nvPr/>
+        </p:nvSpPr>
+        <p:spPr>
+          <a:xfrm>
+            <a:off x="502920" y="1298448"/>
+            <a:ext cx="11155680" cy="777240"/>
           </a:xfrm>
           <a:prstGeom prst="rect">
             <a:avLst/>
@@ -3338,26 +3528,26 @@
           <a:p>
             <a:pPr algn="l"/>
             <a:r>
-              <a:rPr sz="1800" b="0">
+              <a:rPr sz="1500" b="0">
                 <a:solidFill>
                   <a:srgbClr val="FFFFFF"/>
                 </a:solidFill>
               </a:rPr>
-              <a:t>• "Issue the authorization code but add a warning in the response",</a:t>
-            </a:r>
-          </a:p>
-        </p:txBody>
-      </p:sp>
-      <p:sp>
-        <p:nvSpPr>
-          <p:cNvPr id="5" name="TextBox 4"/>
-          <p:cNvSpPr txBox="1"/>
-          <p:nvPr/>
-        </p:nvSpPr>
-        <p:spPr>
-          <a:xfrm>
-            <a:off x="868680" y="2697480"/>
-            <a:ext cx="10515600" cy="1005840"/>
+              <a:t>▸  Decode the DPoP proof header without verification to extract the embedded JWK</a:t>
+            </a:r>
+          </a:p>
+        </p:txBody>
+      </p:sp>
+      <p:sp>
+        <p:nvSpPr>
+          <p:cNvPr id="7" name="TextBox 6"/>
+          <p:cNvSpPr txBox="1"/>
+          <p:nvPr/>
+        </p:nvSpPr>
+        <p:spPr>
+          <a:xfrm>
+            <a:off x="502920" y="2121408"/>
+            <a:ext cx="11155680" cy="777240"/>
           </a:xfrm>
           <a:prstGeom prst="rect">
             <a:avLst/>
@@ -3372,26 +3562,26 @@
           <a:p>
             <a:pPr algn="l"/>
             <a:r>
-              <a:rPr sz="1800" b="0">
+              <a:rPr sz="1500" b="0">
                 <a:solidFill>
                   <a:srgbClr val="FFFFFF"/>
                 </a:solidFill>
               </a:rPr>
-              <a:t>• "Accept it but require the client to prove identity via client_secret instead"</a:t>
-            </a:r>
-          </a:p>
-        </p:txBody>
-      </p:sp>
-      <p:sp>
-        <p:nvSpPr>
-          <p:cNvPr id="6" name="TextBox 5"/>
-          <p:cNvSpPr txBox="1"/>
-          <p:nvPr/>
-        </p:nvSpPr>
-        <p:spPr>
-          <a:xfrm>
-            <a:off x="868680" y="3794760"/>
-            <a:ext cx="10515600" cy="1005840"/>
+              <a:t>▸  Reconstruct the public key from JWK and verify the proof signature with PyJWT[crypto]</a:t>
+            </a:r>
+          </a:p>
+        </p:txBody>
+      </p:sp>
+      <p:sp>
+        <p:nvSpPr>
+          <p:cNvPr id="8" name="TextBox 7"/>
+          <p:cNvSpPr txBox="1"/>
+          <p:nvPr/>
+        </p:nvSpPr>
+        <p:spPr>
+          <a:xfrm>
+            <a:off x="502920" y="2944368"/>
+            <a:ext cx="11155680" cy="777240"/>
           </a:xfrm>
           <a:prstGeom prst="rect">
             <a:avLst/>
@@ -3406,26 +3596,94 @@
           <a:p>
             <a:pPr algn="l"/>
             <a:r>
-              <a:rPr sz="1800" b="0">
+              <a:rPr sz="1500" b="0">
                 <a:solidFill>
                   <a:srgbClr val="FFFFFF"/>
                 </a:solidFill>
               </a:rPr>
-              <a:t>• explanation="OAuth 2.1 makes PKCE mandatory for ALL authorization code grants — there is no exception for confidential clients.</a:t>
-            </a:r>
-          </a:p>
-        </p:txBody>
-      </p:sp>
-      <p:sp>
-        <p:nvSpPr>
-          <p:cNvPr id="7" name="TextBox 6"/>
-          <p:cNvSpPr txBox="1"/>
-          <p:nvPr/>
-        </p:nvSpPr>
-        <p:spPr>
-          <a:xfrm>
-            <a:off x="731520" y="6263640"/>
-            <a:ext cx="10698480" cy="320040"/>
+              <a:t>▸  Compute expected_ath = BASE64URL(SHA256(access_token)) and compare to the proof's ath claim</a:t>
+            </a:r>
+          </a:p>
+        </p:txBody>
+      </p:sp>
+      <p:sp>
+        <p:nvSpPr>
+          <p:cNvPr id="9" name="TextBox 8"/>
+          <p:cNvSpPr txBox="1"/>
+          <p:nvPr/>
+        </p:nvSpPr>
+        <p:spPr>
+          <a:xfrm>
+            <a:off x="502920" y="3767328"/>
+            <a:ext cx="11155680" cy="777240"/>
+          </a:xfrm>
+          <a:prstGeom prst="rect">
+            <a:avLst/>
+          </a:prstGeom>
+          <a:noFill/>
+        </p:spPr>
+        <p:txBody>
+          <a:bodyPr wrap="square">
+            <a:spAutoFit/>
+          </a:bodyPr>
+          <a:lstStyle/>
+          <a:p>
+            <a:pPr algn="l"/>
+            <a:r>
+              <a:rPr sz="1500" b="0">
+                <a:solidFill>
+                  <a:srgbClr val="FFFFFF"/>
+                </a:solidFill>
+              </a:rPr>
+              <a:t>▸  Store used JTIs in a Redis store with TTL = max_age_seconds to prevent replay across instances</a:t>
+            </a:r>
+          </a:p>
+        </p:txBody>
+      </p:sp>
+      <p:sp>
+        <p:nvSpPr>
+          <p:cNvPr id="10" name="TextBox 9"/>
+          <p:cNvSpPr txBox="1"/>
+          <p:nvPr/>
+        </p:nvSpPr>
+        <p:spPr>
+          <a:xfrm>
+            <a:off x="502920" y="4590288"/>
+            <a:ext cx="11155680" cy="777240"/>
+          </a:xfrm>
+          <a:prstGeom prst="rect">
+            <a:avLst/>
+          </a:prstGeom>
+          <a:noFill/>
+        </p:spPr>
+        <p:txBody>
+          <a:bodyPr wrap="square">
+            <a:spAutoFit/>
+          </a:bodyPr>
+          <a:lstStyle/>
+          <a:p>
+            <a:pPr algn="l"/>
+            <a:r>
+              <a:rPr sz="1500" b="0">
+                <a:solidFill>
+                  <a:srgbClr val="FFFFFF"/>
+                </a:solidFill>
+              </a:rPr>
+              <a:t>▸  On any validation failure: return HTTP 401 + WWW-Authenticate: DPoP realm=mcp-server header</a:t>
+            </a:r>
+          </a:p>
+        </p:txBody>
+      </p:sp>
+      <p:sp>
+        <p:nvSpPr>
+          <p:cNvPr id="11" name="TextBox 10"/>
+          <p:cNvSpPr txBox="1"/>
+          <p:nvPr/>
+        </p:nvSpPr>
+        <p:spPr>
+          <a:xfrm>
+            <a:off x="457200" y="6492240"/>
+            <a:ext cx="11247120" cy="320040"/>
           </a:xfrm>
           <a:prstGeom prst="rect">
             <a:avLst/>
@@ -3461,14 +3719,6 @@
 <file path=ppt/slides/slide11.xml><?xml version="1.0" encoding="utf-8"?>
 <p:sld xmlns:a="http://schemas.openxmlformats.org/drawingml/2006/main" xmlns:p="http://schemas.openxmlformats.org/presentationml/2006/main" xmlns:r="http://schemas.openxmlformats.org/officeDocument/2006/relationships">
   <p:cSld>
-    <p:bg>
-      <p:bgPr>
-        <a:solidFill>
-          <a:srgbClr val="18181B"/>
-        </a:solidFill>
-        <a:effectLst/>
-      </p:bgPr>
-    </p:bg>
     <p:spTree>
       <p:nvGrpSpPr>
         <p:cNvPr id="1" name=""/>
@@ -3478,35 +3728,44 @@
       <p:grpSpPr/>
       <p:sp>
         <p:nvSpPr>
-          <p:cNvPr id="2" name="TextBox 1"/>
-          <p:cNvSpPr txBox="1"/>
-          <p:nvPr/>
-        </p:nvSpPr>
-        <p:spPr>
-          <a:xfrm>
-            <a:off x="731520" y="411480"/>
-            <a:ext cx="10789920" cy="822960"/>
-          </a:xfrm>
-          <a:prstGeom prst="rect">
-            <a:avLst/>
-          </a:prstGeom>
-          <a:noFill/>
-        </p:spPr>
-        <p:txBody>
-          <a:bodyPr wrap="square">
-            <a:spAutoFit/>
-          </a:bodyPr>
-          <a:lstStyle/>
-          <a:p>
-            <a:pPr algn="l"/>
-            <a:r>
-              <a:rPr sz="2600" b="1">
-                <a:solidFill>
-                  <a:srgbClr val="FFFFFF"/>
-                </a:solidFill>
-              </a:rPr>
-              <a:t>Bearer tokens and why they're not enough</a:t>
-            </a:r>
+          <p:cNvPr id="2" name="Rectangle 1"/>
+          <p:cNvSpPr/>
+          <p:nvPr/>
+        </p:nvSpPr>
+        <p:spPr>
+          <a:xfrm>
+            <a:off x="0" y="0"/>
+            <a:ext cx="12191695" cy="6858000"/>
+          </a:xfrm>
+          <a:prstGeom prst="rect">
+            <a:avLst/>
+          </a:prstGeom>
+          <a:solidFill>
+            <a:srgbClr val="18181B"/>
+          </a:solidFill>
+          <a:ln>
+            <a:noFill/>
+          </a:ln>
+        </p:spPr>
+        <p:style>
+          <a:lnRef idx="1">
+            <a:schemeClr val="accent1"/>
+          </a:lnRef>
+          <a:fillRef idx="3">
+            <a:schemeClr val="accent1"/>
+          </a:fillRef>
+          <a:effectRef idx="2">
+            <a:schemeClr val="accent1"/>
+          </a:effectRef>
+          <a:fontRef idx="minor">
+            <a:schemeClr val="lt1"/>
+          </a:fontRef>
+        </p:style>
+        <p:txBody>
+          <a:bodyPr rtlCol="0" anchor="ctr"/>
+          <a:lstStyle/>
+          <a:p>
+            <a:pPr algn="ctr"/>
           </a:p>
         </p:txBody>
       </p:sp>
@@ -3518,8 +3777,85 @@
         </p:nvSpPr>
         <p:spPr>
           <a:xfrm>
-            <a:off x="731520" y="1325880"/>
-            <a:ext cx="10789920" cy="27432"/>
+            <a:off x="0" y="0"/>
+            <a:ext cx="12191695" cy="54864"/>
+          </a:xfrm>
+          <a:prstGeom prst="rect">
+            <a:avLst/>
+          </a:prstGeom>
+          <a:solidFill>
+            <a:srgbClr val="6366F1"/>
+          </a:solidFill>
+          <a:ln>
+            <a:noFill/>
+          </a:ln>
+        </p:spPr>
+        <p:style>
+          <a:lnRef idx="1">
+            <a:schemeClr val="accent1"/>
+          </a:lnRef>
+          <a:fillRef idx="3">
+            <a:schemeClr val="accent1"/>
+          </a:fillRef>
+          <a:effectRef idx="2">
+            <a:schemeClr val="accent1"/>
+          </a:effectRef>
+          <a:fontRef idx="minor">
+            <a:schemeClr val="lt1"/>
+          </a:fontRef>
+        </p:style>
+        <p:txBody>
+          <a:bodyPr rtlCol="0" anchor="ctr"/>
+          <a:lstStyle/>
+          <a:p>
+            <a:pPr algn="ctr"/>
+          </a:p>
+        </p:txBody>
+      </p:sp>
+      <p:sp>
+        <p:nvSpPr>
+          <p:cNvPr id="4" name="TextBox 3"/>
+          <p:cNvSpPr txBox="1"/>
+          <p:nvPr/>
+        </p:nvSpPr>
+        <p:spPr>
+          <a:xfrm>
+            <a:off x="457200" y="164592"/>
+            <a:ext cx="11247120" cy="868680"/>
+          </a:xfrm>
+          <a:prstGeom prst="rect">
+            <a:avLst/>
+          </a:prstGeom>
+          <a:noFill/>
+        </p:spPr>
+        <p:txBody>
+          <a:bodyPr wrap="square">
+            <a:spAutoFit/>
+          </a:bodyPr>
+          <a:lstStyle/>
+          <a:p>
+            <a:pPr algn="l"/>
+            <a:r>
+              <a:rPr sz="2800" b="1">
+                <a:solidFill>
+                  <a:srgbClr val="FFFFFF"/>
+                </a:solidFill>
+              </a:rPr>
+              <a:t>Structured Audit Logging for Every Tool Call</a:t>
+            </a:r>
+          </a:p>
+        </p:txBody>
+      </p:sp>
+      <p:sp>
+        <p:nvSpPr>
+          <p:cNvPr id="5" name="Rectangle 4"/>
+          <p:cNvSpPr/>
+          <p:nvPr/>
+        </p:nvSpPr>
+        <p:spPr>
+          <a:xfrm>
+            <a:off x="457200" y="1143000"/>
+            <a:ext cx="11247120" cy="27432"/>
           </a:xfrm>
           <a:prstGeom prst="rect">
             <a:avLst/>
@@ -3555,14 +3891,14 @@
       </p:sp>
       <p:sp>
         <p:nvSpPr>
-          <p:cNvPr id="4" name="TextBox 3"/>
-          <p:cNvSpPr txBox="1"/>
-          <p:nvPr/>
-        </p:nvSpPr>
-        <p:spPr>
-          <a:xfrm>
-            <a:off x="868680" y="1600200"/>
-            <a:ext cx="10515600" cy="1005840"/>
+          <p:cNvPr id="6" name="TextBox 5"/>
+          <p:cNvSpPr txBox="1"/>
+          <p:nvPr/>
+        </p:nvSpPr>
+        <p:spPr>
+          <a:xfrm>
+            <a:off x="502920" y="1298448"/>
+            <a:ext cx="11155680" cy="777240"/>
           </a:xfrm>
           <a:prstGeom prst="rect">
             <a:avLst/>
@@ -3577,26 +3913,26 @@
           <a:p>
             <a:pPr algn="l"/>
             <a:r>
-              <a:rPr sz="1800" b="0">
+              <a:rPr sz="1500" b="0">
                 <a:solidFill>
                   <a:srgbClr val="FFFFFF"/>
                 </a:solidFill>
               </a:rPr>
-              <a:t>• Before understanding DPoP, you need to understand what's wrong with Bearer tokens in the MCP context.</a:t>
-            </a:r>
-          </a:p>
-        </p:txBody>
-      </p:sp>
-      <p:sp>
-        <p:nvSpPr>
-          <p:cNvPr id="5" name="TextBox 4"/>
-          <p:cNvSpPr txBox="1"/>
-          <p:nvPr/>
-        </p:nvSpPr>
-        <p:spPr>
-          <a:xfrm>
-            <a:off x="868680" y="2697480"/>
-            <a:ext cx="10515600" cy="1005840"/>
+              <a:t>▸  Emit one JSON line per request to stderr: ts, event, sub, method, tool, args_hash</a:t>
+            </a:r>
+          </a:p>
+        </p:txBody>
+      </p:sp>
+      <p:sp>
+        <p:nvSpPr>
+          <p:cNvPr id="7" name="TextBox 6"/>
+          <p:cNvSpPr txBox="1"/>
+          <p:nvPr/>
+        </p:nvSpPr>
+        <p:spPr>
+          <a:xfrm>
+            <a:off x="502920" y="2121408"/>
+            <a:ext cx="11155680" cy="777240"/>
           </a:xfrm>
           <a:prstGeom prst="rect">
             <a:avLst/>
@@ -3611,26 +3947,26 @@
           <a:p>
             <a:pPr algn="l"/>
             <a:r>
-              <a:rPr sz="1800" b="0">
+              <a:rPr sz="1500" b="0">
                 <a:solidFill>
                   <a:srgbClr val="FFFFFF"/>
                 </a:solidFill>
               </a:rPr>
-              <a:t>• A Bearer token is exactly what the name implies: whoever bears it wins.</a:t>
-            </a:r>
-          </a:p>
-        </p:txBody>
-      </p:sp>
-      <p:sp>
-        <p:nvSpPr>
-          <p:cNvPr id="6" name="TextBox 5"/>
-          <p:cNvSpPr txBox="1"/>
-          <p:nvPr/>
-        </p:nvSpPr>
-        <p:spPr>
-          <a:xfrm>
-            <a:off x="868680" y="3794760"/>
-            <a:ext cx="10515600" cy="1005840"/>
+              <a:t>▸  auth_failure events include error_code (invalid_dpop_proof, use_dpop_nonce) for SIEM routing</a:t>
+            </a:r>
+          </a:p>
+        </p:txBody>
+      </p:sp>
+      <p:sp>
+        <p:nvSpPr>
+          <p:cNvPr id="8" name="TextBox 7"/>
+          <p:cNvSpPr txBox="1"/>
+          <p:nvPr/>
+        </p:nvSpPr>
+        <p:spPr>
+          <a:xfrm>
+            <a:off x="502920" y="2944368"/>
+            <a:ext cx="11155680" cy="777240"/>
           </a:xfrm>
           <a:prstGeom prst="rect">
             <a:avLst/>
@@ -3645,26 +3981,26 @@
           <a:p>
             <a:pPr algn="l"/>
             <a:r>
-              <a:rPr sz="1800" b="0">
+              <a:rPr sz="1500" b="0">
                 <a:solidFill>
                   <a:srgbClr val="FFFFFF"/>
                 </a:solidFill>
               </a:rPr>
-              <a:t>• In traditional web app contexts, Bearer tokens are acceptable because:</a:t>
-            </a:r>
-          </a:p>
-        </p:txBody>
-      </p:sp>
-      <p:sp>
-        <p:nvSpPr>
-          <p:cNvPr id="7" name="TextBox 6"/>
-          <p:cNvSpPr txBox="1"/>
-          <p:nvPr/>
-        </p:nvSpPr>
-        <p:spPr>
-          <a:xfrm>
-            <a:off x="868680" y="4892040"/>
-            <a:ext cx="10515600" cy="1005840"/>
+              <a:t>▸  Hash tool arguments (SHA-256 prefix) — audit record captures shape, not sensitive values</a:t>
+            </a:r>
+          </a:p>
+        </p:txBody>
+      </p:sp>
+      <p:sp>
+        <p:nvSpPr>
+          <p:cNvPr id="9" name="TextBox 8"/>
+          <p:cNvSpPr txBox="1"/>
+          <p:nvPr/>
+        </p:nvSpPr>
+        <p:spPr>
+          <a:xfrm>
+            <a:off x="502920" y="3767328"/>
+            <a:ext cx="11155680" cy="777240"/>
           </a:xfrm>
           <a:prstGeom prst="rect">
             <a:avLst/>
@@ -3679,26 +4015,60 @@
           <a:p>
             <a:pPr algn="l"/>
             <a:r>
-              <a:rPr sz="1800" b="0">
+              <a:rPr sz="1500" b="0">
                 <a:solidFill>
                   <a:srgbClr val="FFFFFF"/>
                 </a:solidFill>
               </a:rPr>
-              <a:t>• Prompt injection is a first-class attack vector.</a:t>
-            </a:r>
-          </a:p>
-        </p:txBody>
-      </p:sp>
-      <p:sp>
-        <p:nvSpPr>
-          <p:cNvPr id="8" name="TextBox 7"/>
-          <p:cNvSpPr txBox="1"/>
-          <p:nvPr/>
-        </p:nvSpPr>
-        <p:spPr>
-          <a:xfrm>
-            <a:off x="731520" y="6263640"/>
-            <a:ext cx="10698480" cy="320040"/>
+              <a:t>▸  Log pipeline can filter auth_failure at high rate to detect credential-stuffing against your MCP server</a:t>
+            </a:r>
+          </a:p>
+        </p:txBody>
+      </p:sp>
+      <p:sp>
+        <p:nvSpPr>
+          <p:cNvPr id="10" name="TextBox 9"/>
+          <p:cNvSpPr txBox="1"/>
+          <p:nvPr/>
+        </p:nvSpPr>
+        <p:spPr>
+          <a:xfrm>
+            <a:off x="502920" y="4590288"/>
+            <a:ext cx="11155680" cy="777240"/>
+          </a:xfrm>
+          <a:prstGeom prst="rect">
+            <a:avLst/>
+          </a:prstGeom>
+          <a:noFill/>
+        </p:spPr>
+        <p:txBody>
+          <a:bodyPr wrap="square">
+            <a:spAutoFit/>
+          </a:bodyPr>
+          <a:lstStyle/>
+          <a:p>
+            <a:pPr algn="l"/>
+            <a:r>
+              <a:rPr sz="1500" b="0">
+                <a:solidFill>
+                  <a:srgbClr val="FFFFFF"/>
+                </a:solidFill>
+              </a:rPr>
+              <a:t>▸  SOC 2 audit templates require both access events and failure events with actor identity</a:t>
+            </a:r>
+          </a:p>
+        </p:txBody>
+      </p:sp>
+      <p:sp>
+        <p:nvSpPr>
+          <p:cNvPr id="11" name="TextBox 10"/>
+          <p:cNvSpPr txBox="1"/>
+          <p:nvPr/>
+        </p:nvSpPr>
+        <p:spPr>
+          <a:xfrm>
+            <a:off x="457200" y="6492240"/>
+            <a:ext cx="11247120" cy="320040"/>
           </a:xfrm>
           <a:prstGeom prst="rect">
             <a:avLst/>
@@ -3734,14 +4104,6 @@
 <file path=ppt/slides/slide12.xml><?xml version="1.0" encoding="utf-8"?>
 <p:sld xmlns:a="http://schemas.openxmlformats.org/drawingml/2006/main" xmlns:p="http://schemas.openxmlformats.org/presentationml/2006/main" xmlns:r="http://schemas.openxmlformats.org/officeDocument/2006/relationships">
   <p:cSld>
-    <p:bg>
-      <p:bgPr>
-        <a:solidFill>
-          <a:srgbClr val="18181B"/>
-        </a:solidFill>
-        <a:effectLst/>
-      </p:bgPr>
-    </p:bg>
     <p:spTree>
       <p:nvGrpSpPr>
         <p:cNvPr id="1" name=""/>
@@ -3751,35 +4113,44 @@
       <p:grpSpPr/>
       <p:sp>
         <p:nvSpPr>
-          <p:cNvPr id="2" name="TextBox 1"/>
-          <p:cNvSpPr txBox="1"/>
-          <p:nvPr/>
-        </p:nvSpPr>
-        <p:spPr>
-          <a:xfrm>
-            <a:off x="731520" y="411480"/>
-            <a:ext cx="10789920" cy="822960"/>
-          </a:xfrm>
-          <a:prstGeom prst="rect">
-            <a:avLst/>
-          </a:prstGeom>
-          <a:noFill/>
-        </p:spPr>
-        <p:txBody>
-          <a:bodyPr wrap="square">
-            <a:spAutoFit/>
-          </a:bodyPr>
-          <a:lstStyle/>
-          <a:p>
-            <a:pPr algn="l"/>
-            <a:r>
-              <a:rPr sz="2600" b="1">
-                <a:solidFill>
-                  <a:srgbClr val="FFFFFF"/>
-                </a:solidFill>
-              </a:rPr>
-              <a:t>Bearer tokens and why they're not enough (2)</a:t>
-            </a:r>
+          <p:cNvPr id="2" name="Rectangle 1"/>
+          <p:cNvSpPr/>
+          <p:nvPr/>
+        </p:nvSpPr>
+        <p:spPr>
+          <a:xfrm>
+            <a:off x="0" y="0"/>
+            <a:ext cx="12191695" cy="6858000"/>
+          </a:xfrm>
+          <a:prstGeom prst="rect">
+            <a:avLst/>
+          </a:prstGeom>
+          <a:solidFill>
+            <a:srgbClr val="18181B"/>
+          </a:solidFill>
+          <a:ln>
+            <a:noFill/>
+          </a:ln>
+        </p:spPr>
+        <p:style>
+          <a:lnRef idx="1">
+            <a:schemeClr val="accent1"/>
+          </a:lnRef>
+          <a:fillRef idx="3">
+            <a:schemeClr val="accent1"/>
+          </a:fillRef>
+          <a:effectRef idx="2">
+            <a:schemeClr val="accent1"/>
+          </a:effectRef>
+          <a:fontRef idx="minor">
+            <a:schemeClr val="lt1"/>
+          </a:fontRef>
+        </p:style>
+        <p:txBody>
+          <a:bodyPr rtlCol="0" anchor="ctr"/>
+          <a:lstStyle/>
+          <a:p>
+            <a:pPr algn="ctr"/>
           </a:p>
         </p:txBody>
       </p:sp>
@@ -3791,8 +4162,85 @@
         </p:nvSpPr>
         <p:spPr>
           <a:xfrm>
-            <a:off x="731520" y="1325880"/>
-            <a:ext cx="10789920" cy="27432"/>
+            <a:off x="0" y="0"/>
+            <a:ext cx="12191695" cy="54864"/>
+          </a:xfrm>
+          <a:prstGeom prst="rect">
+            <a:avLst/>
+          </a:prstGeom>
+          <a:solidFill>
+            <a:srgbClr val="6366F1"/>
+          </a:solidFill>
+          <a:ln>
+            <a:noFill/>
+          </a:ln>
+        </p:spPr>
+        <p:style>
+          <a:lnRef idx="1">
+            <a:schemeClr val="accent1"/>
+          </a:lnRef>
+          <a:fillRef idx="3">
+            <a:schemeClr val="accent1"/>
+          </a:fillRef>
+          <a:effectRef idx="2">
+            <a:schemeClr val="accent1"/>
+          </a:effectRef>
+          <a:fontRef idx="minor">
+            <a:schemeClr val="lt1"/>
+          </a:fontRef>
+        </p:style>
+        <p:txBody>
+          <a:bodyPr rtlCol="0" anchor="ctr"/>
+          <a:lstStyle/>
+          <a:p>
+            <a:pPr algn="ctr"/>
+          </a:p>
+        </p:txBody>
+      </p:sp>
+      <p:sp>
+        <p:nvSpPr>
+          <p:cNvPr id="4" name="TextBox 3"/>
+          <p:cNvSpPr txBox="1"/>
+          <p:nvPr/>
+        </p:nvSpPr>
+        <p:spPr>
+          <a:xfrm>
+            <a:off x="457200" y="164592"/>
+            <a:ext cx="11247120" cy="868680"/>
+          </a:xfrm>
+          <a:prstGeom prst="rect">
+            <a:avLst/>
+          </a:prstGeom>
+          <a:noFill/>
+        </p:spPr>
+        <p:txBody>
+          <a:bodyPr wrap="square">
+            <a:spAutoFit/>
+          </a:bodyPr>
+          <a:lstStyle/>
+          <a:p>
+            <a:pPr algn="l"/>
+            <a:r>
+              <a:rPr sz="2800" b="1">
+                <a:solidFill>
+                  <a:srgbClr val="FFFFFF"/>
+                </a:solidFill>
+              </a:rPr>
+              <a:t>Production Hardening Checklist</a:t>
+            </a:r>
+          </a:p>
+        </p:txBody>
+      </p:sp>
+      <p:sp>
+        <p:nvSpPr>
+          <p:cNvPr id="5" name="Rectangle 4"/>
+          <p:cNvSpPr/>
+          <p:nvPr/>
+        </p:nvSpPr>
+        <p:spPr>
+          <a:xfrm>
+            <a:off x="457200" y="1143000"/>
+            <a:ext cx="11247120" cy="27432"/>
           </a:xfrm>
           <a:prstGeom prst="rect">
             <a:avLst/>
@@ -3828,14 +4276,14 @@
       </p:sp>
       <p:sp>
         <p:nvSpPr>
-          <p:cNvPr id="4" name="TextBox 3"/>
-          <p:cNvSpPr txBox="1"/>
-          <p:nvPr/>
-        </p:nvSpPr>
-        <p:spPr>
-          <a:xfrm>
-            <a:off x="868680" y="1600200"/>
-            <a:ext cx="10515600" cy="1005840"/>
+          <p:cNvPr id="6" name="TextBox 5"/>
+          <p:cNvSpPr txBox="1"/>
+          <p:nvPr/>
+        </p:nvSpPr>
+        <p:spPr>
+          <a:xfrm>
+            <a:off x="502920" y="1298448"/>
+            <a:ext cx="11155680" cy="777240"/>
           </a:xfrm>
           <a:prstGeom prst="rect">
             <a:avLst/>
@@ -3850,26 +4298,26 @@
           <a:p>
             <a:pPr algn="l"/>
             <a:r>
-              <a:rPr sz="1800" b="0">
+              <a:rPr sz="1500" b="0">
                 <a:solidFill>
                   <a:srgbClr val="FFFFFF"/>
                 </a:solidFill>
               </a:rPr>
-              <a:t>• Multi-tenant HTTP servers share a token endpoint.</a:t>
-            </a:r>
-          </a:p>
-        </p:txBody>
-      </p:sp>
-      <p:sp>
-        <p:nvSpPr>
-          <p:cNvPr id="5" name="TextBox 4"/>
-          <p:cNvSpPr txBox="1"/>
-          <p:nvPr/>
-        </p:nvSpPr>
-        <p:spPr>
-          <a:xfrm>
-            <a:off x="868680" y="2697480"/>
-            <a:ext cx="10515600" cy="1005840"/>
+              <a:t>▸  Replace in-memory JTI set with Redis + TTL — required for horizontally-scaled deployments</a:t>
+            </a:r>
+          </a:p>
+        </p:txBody>
+      </p:sp>
+      <p:sp>
+        <p:nvSpPr>
+          <p:cNvPr id="7" name="TextBox 6"/>
+          <p:cNvSpPr txBox="1"/>
+          <p:nvPr/>
+        </p:nvSpPr>
+        <p:spPr>
+          <a:xfrm>
+            <a:off x="502920" y="2121408"/>
+            <a:ext cx="11155680" cy="777240"/>
           </a:xfrm>
           <a:prstGeom prst="rect">
             <a:avLst/>
@@ -3884,26 +4332,128 @@
           <a:p>
             <a:pPr algn="l"/>
             <a:r>
-              <a:rPr sz="1800" b="0">
+              <a:rPr sz="1500" b="0">
                 <a:solidFill>
                   <a:srgbClr val="FFFFFF"/>
                 </a:solidFill>
               </a:rPr>
-              <a:t>• Long-running agentic sessions hold tokens for extended periods.</a:t>
-            </a:r>
-          </a:p>
-        </p:txBody>
-      </p:sp>
-      <p:sp>
-        <p:nvSpPr>
-          <p:cNvPr id="6" name="TextBox 5"/>
-          <p:cNvSpPr txBox="1"/>
-          <p:nvPr/>
-        </p:nvSpPr>
-        <p:spPr>
-          <a:xfrm>
-            <a:off x="731520" y="6263640"/>
-            <a:ext cx="10698480" cy="320040"/>
+              <a:t>▸  Set DPoP max_age to 60 seconds; tighter windows reduce replay window at cost of clock-skew tolerance</a:t>
+            </a:r>
+          </a:p>
+        </p:txBody>
+      </p:sp>
+      <p:sp>
+        <p:nvSpPr>
+          <p:cNvPr id="8" name="TextBox 7"/>
+          <p:cNvSpPr txBox="1"/>
+          <p:nvPr/>
+        </p:nvSpPr>
+        <p:spPr>
+          <a:xfrm>
+            <a:off x="502920" y="2944368"/>
+            <a:ext cx="11155680" cy="777240"/>
+          </a:xfrm>
+          <a:prstGeom prst="rect">
+            <a:avLst/>
+          </a:prstGeom>
+          <a:noFill/>
+        </p:spPr>
+        <p:txBody>
+          <a:bodyPr wrap="square">
+            <a:spAutoFit/>
+          </a:bodyPr>
+          <a:lstStyle/>
+          <a:p>
+            <a:pPr algn="l"/>
+            <a:r>
+              <a:rPr sz="1500" b="0">
+                <a:solidFill>
+                  <a:srgbClr val="FFFFFF"/>
+                </a:solidFill>
+              </a:rPr>
+              <a:t>▸  Rotate ephemeral DPoP keys per session, not per request, to balance security and performance</a:t>
+            </a:r>
+          </a:p>
+        </p:txBody>
+      </p:sp>
+      <p:sp>
+        <p:nvSpPr>
+          <p:cNvPr id="9" name="TextBox 8"/>
+          <p:cNvSpPr txBox="1"/>
+          <p:nvPr/>
+        </p:nvSpPr>
+        <p:spPr>
+          <a:xfrm>
+            <a:off x="502920" y="3767328"/>
+            <a:ext cx="11155680" cy="777240"/>
+          </a:xfrm>
+          <a:prstGeom prst="rect">
+            <a:avLst/>
+          </a:prstGeom>
+          <a:noFill/>
+        </p:spPr>
+        <p:txBody>
+          <a:bodyPr wrap="square">
+            <a:spAutoFit/>
+          </a:bodyPr>
+          <a:lstStyle/>
+          <a:p>
+            <a:pPr algn="l"/>
+            <a:r>
+              <a:rPr sz="1500" b="0">
+                <a:solidFill>
+                  <a:srgbClr val="FFFFFF"/>
+                </a:solidFill>
+              </a:rPr>
+              <a:t>▸  Declare dpop_signing_alg_values_supported before all clients support DPoP for zero-flag-day migration</a:t>
+            </a:r>
+          </a:p>
+        </p:txBody>
+      </p:sp>
+      <p:sp>
+        <p:nvSpPr>
+          <p:cNvPr id="10" name="TextBox 9"/>
+          <p:cNvSpPr txBox="1"/>
+          <p:nvPr/>
+        </p:nvSpPr>
+        <p:spPr>
+          <a:xfrm>
+            <a:off x="502920" y="4590288"/>
+            <a:ext cx="11155680" cy="777240"/>
+          </a:xfrm>
+          <a:prstGeom prst="rect">
+            <a:avLst/>
+          </a:prstGeom>
+          <a:noFill/>
+        </p:spPr>
+        <p:txBody>
+          <a:bodyPr wrap="square">
+            <a:spAutoFit/>
+          </a:bodyPr>
+          <a:lstStyle/>
+          <a:p>
+            <a:pPr algn="l"/>
+            <a:r>
+              <a:rPr sz="1500" b="0">
+                <a:solidFill>
+                  <a:srgbClr val="FFFFFF"/>
+                </a:solidFill>
+              </a:rPr>
+              <a:t>▸  Test the 401 path explicitly — unauthenticated tools/call must return WWW-Authenticate: DPoP header</a:t>
+            </a:r>
+          </a:p>
+        </p:txBody>
+      </p:sp>
+      <p:sp>
+        <p:nvSpPr>
+          <p:cNvPr id="11" name="TextBox 10"/>
+          <p:cNvSpPr txBox="1"/>
+          <p:nvPr/>
+        </p:nvSpPr>
+        <p:spPr>
+          <a:xfrm>
+            <a:off x="457200" y="6492240"/>
+            <a:ext cx="11247120" cy="320040"/>
           </a:xfrm>
           <a:prstGeom prst="rect">
             <a:avLst/>
@@ -3939,14 +4489,6 @@
 <file path=ppt/slides/slide13.xml><?xml version="1.0" encoding="utf-8"?>
 <p:sld xmlns:a="http://schemas.openxmlformats.org/drawingml/2006/main" xmlns:p="http://schemas.openxmlformats.org/presentationml/2006/main" xmlns:r="http://schemas.openxmlformats.org/officeDocument/2006/relationships">
   <p:cSld>
-    <p:bg>
-      <p:bgPr>
-        <a:solidFill>
-          <a:srgbClr val="18181B"/>
-        </a:solidFill>
-        <a:effectLst/>
-      </p:bgPr>
-    </p:bg>
     <p:spTree>
       <p:nvGrpSpPr>
         <p:cNvPr id="1" name=""/>
@@ -3956,35 +4498,44 @@
       <p:grpSpPr/>
       <p:sp>
         <p:nvSpPr>
-          <p:cNvPr id="2" name="TextBox 1"/>
-          <p:cNvSpPr txBox="1"/>
-          <p:nvPr/>
-        </p:nvSpPr>
-        <p:spPr>
-          <a:xfrm>
-            <a:off x="731520" y="411480"/>
-            <a:ext cx="10789920" cy="822960"/>
-          </a:xfrm>
-          <a:prstGeom prst="rect">
-            <a:avLst/>
-          </a:prstGeom>
-          <a:noFill/>
-        </p:spPr>
-        <p:txBody>
-          <a:bodyPr wrap="square">
-            <a:spAutoFit/>
-          </a:bodyPr>
-          <a:lstStyle/>
-          <a:p>
-            <a:pPr algn="l"/>
-            <a:r>
-              <a:rPr sz="2600" b="1">
-                <a:solidFill>
-                  <a:srgbClr val="FFFFFF"/>
-                </a:solidFill>
-              </a:rPr>
-              <a:t>DPoP: how token binding works</a:t>
-            </a:r>
+          <p:cNvPr id="2" name="Rectangle 1"/>
+          <p:cNvSpPr/>
+          <p:nvPr/>
+        </p:nvSpPr>
+        <p:spPr>
+          <a:xfrm>
+            <a:off x="0" y="0"/>
+            <a:ext cx="12191695" cy="6858000"/>
+          </a:xfrm>
+          <a:prstGeom prst="rect">
+            <a:avLst/>
+          </a:prstGeom>
+          <a:solidFill>
+            <a:srgbClr val="18181B"/>
+          </a:solidFill>
+          <a:ln>
+            <a:noFill/>
+          </a:ln>
+        </p:spPr>
+        <p:style>
+          <a:lnRef idx="1">
+            <a:schemeClr val="accent1"/>
+          </a:lnRef>
+          <a:fillRef idx="3">
+            <a:schemeClr val="accent1"/>
+          </a:fillRef>
+          <a:effectRef idx="2">
+            <a:schemeClr val="accent1"/>
+          </a:effectRef>
+          <a:fontRef idx="minor">
+            <a:schemeClr val="lt1"/>
+          </a:fontRef>
+        </p:style>
+        <p:txBody>
+          <a:bodyPr rtlCol="0" anchor="ctr"/>
+          <a:lstStyle/>
+          <a:p>
+            <a:pPr algn="ctr"/>
           </a:p>
         </p:txBody>
       </p:sp>
@@ -3996,8 +4547,85 @@
         </p:nvSpPr>
         <p:spPr>
           <a:xfrm>
-            <a:off x="731520" y="1325880"/>
-            <a:ext cx="10789920" cy="27432"/>
+            <a:off x="0" y="0"/>
+            <a:ext cx="12191695" cy="54864"/>
+          </a:xfrm>
+          <a:prstGeom prst="rect">
+            <a:avLst/>
+          </a:prstGeom>
+          <a:solidFill>
+            <a:srgbClr val="6366F1"/>
+          </a:solidFill>
+          <a:ln>
+            <a:noFill/>
+          </a:ln>
+        </p:spPr>
+        <p:style>
+          <a:lnRef idx="1">
+            <a:schemeClr val="accent1"/>
+          </a:lnRef>
+          <a:fillRef idx="3">
+            <a:schemeClr val="accent1"/>
+          </a:fillRef>
+          <a:effectRef idx="2">
+            <a:schemeClr val="accent1"/>
+          </a:effectRef>
+          <a:fontRef idx="minor">
+            <a:schemeClr val="lt1"/>
+          </a:fontRef>
+        </p:style>
+        <p:txBody>
+          <a:bodyPr rtlCol="0" anchor="ctr"/>
+          <a:lstStyle/>
+          <a:p>
+            <a:pPr algn="ctr"/>
+          </a:p>
+        </p:txBody>
+      </p:sp>
+      <p:sp>
+        <p:nvSpPr>
+          <p:cNvPr id="4" name="TextBox 3"/>
+          <p:cNvSpPr txBox="1"/>
+          <p:nvPr/>
+        </p:nvSpPr>
+        <p:spPr>
+          <a:xfrm>
+            <a:off x="457200" y="164592"/>
+            <a:ext cx="11247120" cy="868680"/>
+          </a:xfrm>
+          <a:prstGeom prst="rect">
+            <a:avLst/>
+          </a:prstGeom>
+          <a:noFill/>
+        </p:spPr>
+        <p:txBody>
+          <a:bodyPr wrap="square">
+            <a:spAutoFit/>
+          </a:bodyPr>
+          <a:lstStyle/>
+          <a:p>
+            <a:pPr algn="l"/>
+            <a:r>
+              <a:rPr sz="2800" b="1">
+                <a:solidFill>
+                  <a:srgbClr val="FFFFFF"/>
+                </a:solidFill>
+              </a:rPr>
+              <a:t>Hands-On Exercise — What You’ll Build</a:t>
+            </a:r>
+          </a:p>
+        </p:txBody>
+      </p:sp>
+      <p:sp>
+        <p:nvSpPr>
+          <p:cNvPr id="5" name="Rectangle 4"/>
+          <p:cNvSpPr/>
+          <p:nvPr/>
+        </p:nvSpPr>
+        <p:spPr>
+          <a:xfrm>
+            <a:off x="457200" y="1143000"/>
+            <a:ext cx="11247120" cy="27432"/>
           </a:xfrm>
           <a:prstGeom prst="rect">
             <a:avLst/>
@@ -4033,14 +4661,14 @@
       </p:sp>
       <p:sp>
         <p:nvSpPr>
-          <p:cNvPr id="4" name="TextBox 3"/>
-          <p:cNvSpPr txBox="1"/>
-          <p:nvPr/>
-        </p:nvSpPr>
-        <p:spPr>
-          <a:xfrm>
-            <a:off x="868680" y="1600200"/>
-            <a:ext cx="10515600" cy="1005840"/>
+          <p:cNvPr id="6" name="TextBox 5"/>
+          <p:cNvSpPr txBox="1"/>
+          <p:nvPr/>
+        </p:nvSpPr>
+        <p:spPr>
+          <a:xfrm>
+            <a:off x="502920" y="1298448"/>
+            <a:ext cx="11155680" cy="777240"/>
           </a:xfrm>
           <a:prstGeom prst="rect">
             <a:avLst/>
@@ -4055,26 +4683,26 @@
           <a:p>
             <a:pPr algn="l"/>
             <a:r>
-              <a:rPr sz="1800" b="0">
+              <a:rPr sz="1500" b="0">
                 <a:solidFill>
                   <a:srgbClr val="FFFFFF"/>
                 </a:solidFill>
               </a:rPr>
-              <a:t>• DPoP (Demonstration of Proof-of-Possession, RFC 9449) adds a cryptographic binding between an access token and the client that requested it.</a:t>
-            </a:r>
-          </a:p>
-        </p:txBody>
-      </p:sp>
-      <p:sp>
-        <p:nvSpPr>
-          <p:cNvPr id="5" name="TextBox 4"/>
-          <p:cNvSpPr txBox="1"/>
-          <p:nvPr/>
-        </p:nvSpPr>
-        <p:spPr>
-          <a:xfrm>
-            <a:off x="868680" y="2697480"/>
-            <a:ext cx="10515600" cy="1005840"/>
+              <a:t>▸  Extend the Chapter 2 Python echo server to run as an HTTP server on POST /mcp</a:t>
+            </a:r>
+          </a:p>
+        </p:txBody>
+      </p:sp>
+      <p:sp>
+        <p:nvSpPr>
+          <p:cNvPr id="7" name="TextBox 6"/>
+          <p:cNvSpPr txBox="1"/>
+          <p:nvPr/>
+        </p:nvSpPr>
+        <p:spPr>
+          <a:xfrm>
+            <a:off x="502920" y="2121408"/>
+            <a:ext cx="11155680" cy="777240"/>
           </a:xfrm>
           <a:prstGeom prst="rect">
             <a:avLst/>
@@ -4089,26 +4717,26 @@
           <a:p>
             <a:pPr algn="l"/>
             <a:r>
-              <a:rPr sz="1800" b="0">
+              <a:rPr sz="1500" b="0">
                 <a:solidFill>
                   <a:srgbClr val="FFFFFF"/>
                 </a:solidFill>
               </a:rPr>
-              <a:t>• Step 2: Token request with DPoP proof.</a:t>
-            </a:r>
-          </a:p>
-        </p:txBody>
-      </p:sp>
-      <p:sp>
-        <p:nvSpPr>
-          <p:cNvPr id="6" name="TextBox 5"/>
-          <p:cNvSpPr txBox="1"/>
-          <p:nvPr/>
-        </p:nvSpPr>
-        <p:spPr>
-          <a:xfrm>
-            <a:off x="868680" y="3794760"/>
-            <a:ext cx="10515600" cy="1005840"/>
+              <a:t>▸  Add DPoP validation: validate proof on every tools/call; return 401 on any failure</a:t>
+            </a:r>
+          </a:p>
+        </p:txBody>
+      </p:sp>
+      <p:sp>
+        <p:nvSpPr>
+          <p:cNvPr id="8" name="TextBox 7"/>
+          <p:cNvSpPr txBox="1"/>
+          <p:nvPr/>
+        </p:nvSpPr>
+        <p:spPr>
+          <a:xfrm>
+            <a:off x="502920" y="2944368"/>
+            <a:ext cx="11155680" cy="777240"/>
           </a:xfrm>
           <a:prstGeom prst="rect">
             <a:avLst/>
@@ -4123,26 +4751,26 @@
           <a:p>
             <a:pPr algn="l"/>
             <a:r>
-              <a:rPr sz="1800" b="0">
+              <a:rPr sz="1500" b="0">
                 <a:solidFill>
                   <a:srgbClr val="FFFFFF"/>
                 </a:solidFill>
               </a:rPr>
-              <a:t>• jwk: the client's public key</a:t>
-            </a:r>
-          </a:p>
-        </p:txBody>
-      </p:sp>
-      <p:sp>
-        <p:nvSpPr>
-          <p:cNvPr id="7" name="TextBox 6"/>
-          <p:cNvSpPr txBox="1"/>
-          <p:nvPr/>
-        </p:nvSpPr>
-        <p:spPr>
-          <a:xfrm>
-            <a:off x="868680" y="4892040"/>
-            <a:ext cx="10515600" cy="1005840"/>
+              <a:t>▸  Add /.well-known/oauth-authorization-server with dpop_signing_alg_values_supported: [ES256]</a:t>
+            </a:r>
+          </a:p>
+        </p:txBody>
+      </p:sp>
+      <p:sp>
+        <p:nvSpPr>
+          <p:cNvPr id="9" name="TextBox 8"/>
+          <p:cNvSpPr txBox="1"/>
+          <p:nvPr/>
+        </p:nvSpPr>
+        <p:spPr>
+          <a:xfrm>
+            <a:off x="502920" y="3767328"/>
+            <a:ext cx="11155680" cy="777240"/>
           </a:xfrm>
           <a:prstGeom prst="rect">
             <a:avLst/>
@@ -4157,26 +4785,60 @@
           <a:p>
             <a:pPr algn="l"/>
             <a:r>
-              <a:rPr sz="1800" b="0">
+              <a:rPr sz="1500" b="0">
                 <a:solidFill>
                   <a:srgbClr val="FFFFFF"/>
                 </a:solidFill>
               </a:rPr>
-              <a:t>• htm: the HTTP method of this request (POST)</a:t>
-            </a:r>
-          </a:p>
-        </p:txBody>
-      </p:sp>
-      <p:sp>
-        <p:nvSpPr>
-          <p:cNvPr id="8" name="TextBox 7"/>
-          <p:cNvSpPr txBox="1"/>
-          <p:nvPr/>
-        </p:nvSpPr>
-        <p:spPr>
-          <a:xfrm>
-            <a:off x="731520" y="6263640"/>
-            <a:ext cx="10698480" cy="320040"/>
+              <a:t>▸  Emit one structured JSON audit log line per request (event, sub, method, error_code if any)</a:t>
+            </a:r>
+          </a:p>
+        </p:txBody>
+      </p:sp>
+      <p:sp>
+        <p:nvSpPr>
+          <p:cNvPr id="10" name="TextBox 9"/>
+          <p:cNvSpPr txBox="1"/>
+          <p:nvPr/>
+        </p:nvSpPr>
+        <p:spPr>
+          <a:xfrm>
+            <a:off x="502920" y="4590288"/>
+            <a:ext cx="11155680" cy="777240"/>
+          </a:xfrm>
+          <a:prstGeom prst="rect">
+            <a:avLst/>
+          </a:prstGeom>
+          <a:noFill/>
+        </p:spPr>
+        <p:txBody>
+          <a:bodyPr wrap="square">
+            <a:spAutoFit/>
+          </a:bodyPr>
+          <a:lstStyle/>
+          <a:p>
+            <a:pPr algn="l"/>
+            <a:r>
+              <a:rPr sz="1500" b="0">
+                <a:solidFill>
+                  <a:srgbClr val="FFFFFF"/>
+                </a:solidFill>
+              </a:rPr>
+              <a:t>▸  Test with curl: unauthenticated call returns 401, .well-known returns valid JSON</a:t>
+            </a:r>
+          </a:p>
+        </p:txBody>
+      </p:sp>
+      <p:sp>
+        <p:nvSpPr>
+          <p:cNvPr id="11" name="TextBox 10"/>
+          <p:cNvSpPr txBox="1"/>
+          <p:nvPr/>
+        </p:nvSpPr>
+        <p:spPr>
+          <a:xfrm>
+            <a:off x="457200" y="6492240"/>
+            <a:ext cx="11247120" cy="320040"/>
           </a:xfrm>
           <a:prstGeom prst="rect">
             <a:avLst/>
@@ -4212,14 +4874,6 @@
 <file path=ppt/slides/slide14.xml><?xml version="1.0" encoding="utf-8"?>
 <p:sld xmlns:a="http://schemas.openxmlformats.org/drawingml/2006/main" xmlns:p="http://schemas.openxmlformats.org/presentationml/2006/main" xmlns:r="http://schemas.openxmlformats.org/officeDocument/2006/relationships">
   <p:cSld>
-    <p:bg>
-      <p:bgPr>
-        <a:solidFill>
-          <a:srgbClr val="18181B"/>
-        </a:solidFill>
-        <a:effectLst/>
-      </p:bgPr>
-    </p:bg>
     <p:spTree>
       <p:nvGrpSpPr>
         <p:cNvPr id="1" name=""/>
@@ -4229,13 +4883,133 @@
       <p:grpSpPr/>
       <p:sp>
         <p:nvSpPr>
-          <p:cNvPr id="2" name="TextBox 1"/>
+          <p:cNvPr id="2" name="Rectangle 1"/>
+          <p:cNvSpPr/>
+          <p:nvPr/>
+        </p:nvSpPr>
+        <p:spPr>
+          <a:xfrm>
+            <a:off x="0" y="0"/>
+            <a:ext cx="12191695" cy="6858000"/>
+          </a:xfrm>
+          <a:prstGeom prst="rect">
+            <a:avLst/>
+          </a:prstGeom>
+          <a:solidFill>
+            <a:srgbClr val="18181B"/>
+          </a:solidFill>
+          <a:ln>
+            <a:noFill/>
+          </a:ln>
+        </p:spPr>
+        <p:style>
+          <a:lnRef idx="1">
+            <a:schemeClr val="accent1"/>
+          </a:lnRef>
+          <a:fillRef idx="3">
+            <a:schemeClr val="accent1"/>
+          </a:fillRef>
+          <a:effectRef idx="2">
+            <a:schemeClr val="accent1"/>
+          </a:effectRef>
+          <a:fontRef idx="minor">
+            <a:schemeClr val="lt1"/>
+          </a:fontRef>
+        </p:style>
+        <p:txBody>
+          <a:bodyPr rtlCol="0" anchor="ctr"/>
+          <a:lstStyle/>
+          <a:p>
+            <a:pPr algn="ctr"/>
+          </a:p>
+        </p:txBody>
+      </p:sp>
+      <p:sp>
+        <p:nvSpPr>
+          <p:cNvPr id="3" name="Rectangle 2"/>
+          <p:cNvSpPr/>
+          <p:nvPr/>
+        </p:nvSpPr>
+        <p:spPr>
+          <a:xfrm>
+            <a:off x="0" y="0"/>
+            <a:ext cx="54864" cy="6858000"/>
+          </a:xfrm>
+          <a:prstGeom prst="rect">
+            <a:avLst/>
+          </a:prstGeom>
+          <a:solidFill>
+            <a:srgbClr val="6366F1"/>
+          </a:solidFill>
+          <a:ln>
+            <a:noFill/>
+          </a:ln>
+        </p:spPr>
+        <p:style>
+          <a:lnRef idx="1">
+            <a:schemeClr val="accent1"/>
+          </a:lnRef>
+          <a:fillRef idx="3">
+            <a:schemeClr val="accent1"/>
+          </a:fillRef>
+          <a:effectRef idx="2">
+            <a:schemeClr val="accent1"/>
+          </a:effectRef>
+          <a:fontRef idx="minor">
+            <a:schemeClr val="lt1"/>
+          </a:fontRef>
+        </p:style>
+        <p:txBody>
+          <a:bodyPr rtlCol="0" anchor="ctr"/>
+          <a:lstStyle/>
+          <a:p>
+            <a:pPr algn="ctr"/>
+          </a:p>
+        </p:txBody>
+      </p:sp>
+      <p:sp>
+        <p:nvSpPr>
+          <p:cNvPr id="4" name="TextBox 3"/>
           <p:cNvSpPr txBox="1"/>
           <p:nvPr/>
         </p:nvSpPr>
         <p:spPr>
           <a:xfrm>
             <a:off x="914400" y="1828800"/>
+            <a:ext cx="10332720" cy="731520"/>
+          </a:xfrm>
+          <a:prstGeom prst="rect">
+            <a:avLst/>
+          </a:prstGeom>
+          <a:noFill/>
+        </p:spPr>
+        <p:txBody>
+          <a:bodyPr wrap="square">
+            <a:spAutoFit/>
+          </a:bodyPr>
+          <a:lstStyle/>
+          <a:p>
+            <a:pPr algn="ctr"/>
+            <a:r>
+              <a:rPr sz="3600" b="1">
+                <a:solidFill>
+                  <a:srgbClr val="FFFFFF"/>
+                </a:solidFill>
+              </a:rPr>
+              <a:t>Continue to Chapter 5</a:t>
+            </a:r>
+          </a:p>
+        </p:txBody>
+      </p:sp>
+      <p:sp>
+        <p:nvSpPr>
+          <p:cNvPr id="5" name="TextBox 4"/>
+          <p:cNvSpPr txBox="1"/>
+          <p:nvPr/>
+        </p:nvSpPr>
+        <p:spPr>
+          <a:xfrm>
+            <a:off x="914400" y="2743200"/>
             <a:ext cx="10332720" cy="822960"/>
           </a:xfrm>
           <a:prstGeom prst="rect">
@@ -4251,26 +5025,26 @@
           <a:p>
             <a:pPr algn="ctr"/>
             <a:r>
-              <a:rPr sz="3800" b="1">
-                <a:solidFill>
-                  <a:srgbClr val="FFFFFF"/>
-                </a:solidFill>
-              </a:rPr>
-              <a:t>Try it next</a:t>
-            </a:r>
-          </a:p>
-        </p:txBody>
-      </p:sp>
-      <p:sp>
-        <p:nvSpPr>
-          <p:cNvPr id="3" name="TextBox 2"/>
-          <p:cNvSpPr txBox="1"/>
-          <p:nvPr/>
-        </p:nvSpPr>
-        <p:spPr>
-          <a:xfrm>
-            <a:off x="1005840" y="2926080"/>
-            <a:ext cx="10241280" cy="1097280"/>
+              <a:rPr sz="2000" b="0">
+                <a:solidFill>
+                  <a:srgbClr val="A1A1AA"/>
+                </a:solidFill>
+              </a:rPr>
+              <a:t>Gateways, RBAC &amp; Audit Logs — putting auth-enabled MCP servers into production</a:t>
+            </a:r>
+          </a:p>
+        </p:txBody>
+      </p:sp>
+      <p:sp>
+        <p:nvSpPr>
+          <p:cNvPr id="6" name="TextBox 5"/>
+          <p:cNvSpPr txBox="1"/>
+          <p:nvPr/>
+        </p:nvSpPr>
+        <p:spPr>
+          <a:xfrm>
+            <a:off x="914400" y="3931920"/>
+            <a:ext cx="10332720" cy="457200"/>
           </a:xfrm>
           <a:prstGeom prst="rect">
             <a:avLst/>
@@ -4285,77 +5059,9 @@
           <a:p>
             <a:pPr algn="ctr"/>
             <a:r>
-              <a:rPr sz="1800" b="0">
-                <a:solidFill>
-                  <a:srgbClr val="FFFFFF"/>
-                </a:solidFill>
-              </a:rPr>
-              <a:t>Implement DPoP-bound OAuth 2.1 auth on your MCP server and verify with a failing token replay test.</a:t>
-            </a:r>
-          </a:p>
-        </p:txBody>
-      </p:sp>
-      <p:sp>
-        <p:nvSpPr>
-          <p:cNvPr id="4" name="TextBox 3"/>
-          <p:cNvSpPr txBox="1"/>
-          <p:nvPr/>
-        </p:nvSpPr>
-        <p:spPr>
-          <a:xfrm>
-            <a:off x="914400" y="4572000"/>
-            <a:ext cx="10332720" cy="731520"/>
-          </a:xfrm>
-          <a:prstGeom prst="rect">
-            <a:avLst/>
-          </a:prstGeom>
-          <a:noFill/>
-        </p:spPr>
-        <p:txBody>
-          <a:bodyPr wrap="square">
-            <a:spAutoFit/>
-          </a:bodyPr>
-          <a:lstStyle/>
-          <a:p>
-            <a:pPr algn="ctr"/>
-            <a:r>
-              <a:rPr sz="2600" b="1">
-                <a:solidFill>
-                  <a:srgbClr val="A1A1AA"/>
-                </a:solidFill>
-              </a:rPr>
-              <a:t>academy.kspl.tech</a:t>
-            </a:r>
-          </a:p>
-        </p:txBody>
-      </p:sp>
-      <p:sp>
-        <p:nvSpPr>
-          <p:cNvPr id="5" name="TextBox 4"/>
-          <p:cNvSpPr txBox="1"/>
-          <p:nvPr/>
-        </p:nvSpPr>
-        <p:spPr>
-          <a:xfrm>
-            <a:off x="731520" y="6263640"/>
-            <a:ext cx="10698480" cy="320040"/>
-          </a:xfrm>
-          <a:prstGeom prst="rect">
-            <a:avLst/>
-          </a:prstGeom>
-          <a:noFill/>
-        </p:spPr>
-        <p:txBody>
-          <a:bodyPr wrap="square">
-            <a:spAutoFit/>
-          </a:bodyPr>
-          <a:lstStyle/>
-          <a:p>
-            <a:pPr algn="l"/>
-            <a:r>
-              <a:rPr sz="1000" b="0">
-                <a:solidFill>
-                  <a:srgbClr val="A1A1AA"/>
+              <a:rPr sz="1600" b="0">
+                <a:solidFill>
+                  <a:srgbClr val="6366F1"/>
                 </a:solidFill>
               </a:rPr>
               <a:t>academy.kspl.tech | Koenig AI Academy</a:t>
@@ -4374,14 +5080,6 @@
 <file path=ppt/slides/slide2.xml><?xml version="1.0" encoding="utf-8"?>
 <p:sld xmlns:a="http://schemas.openxmlformats.org/drawingml/2006/main" xmlns:p="http://schemas.openxmlformats.org/presentationml/2006/main" xmlns:r="http://schemas.openxmlformats.org/officeDocument/2006/relationships">
   <p:cSld>
-    <p:bg>
-      <p:bgPr>
-        <a:solidFill>
-          <a:srgbClr val="18181B"/>
-        </a:solidFill>
-        <a:effectLst/>
-      </p:bgPr>
-    </p:bg>
     <p:spTree>
       <p:nvGrpSpPr>
         <p:cNvPr id="1" name=""/>
@@ -4391,35 +5089,44 @@
       <p:grpSpPr/>
       <p:sp>
         <p:nvSpPr>
-          <p:cNvPr id="2" name="TextBox 1"/>
-          <p:cNvSpPr txBox="1"/>
-          <p:nvPr/>
-        </p:nvSpPr>
-        <p:spPr>
-          <a:xfrm>
-            <a:off x="731520" y="411480"/>
-            <a:ext cx="10789920" cy="822960"/>
-          </a:xfrm>
-          <a:prstGeom prst="rect">
-            <a:avLst/>
-          </a:prstGeom>
-          <a:noFill/>
-        </p:spPr>
-        <p:txBody>
-          <a:bodyPr wrap="square">
-            <a:spAutoFit/>
-          </a:bodyPr>
-          <a:lstStyle/>
-          <a:p>
-            <a:pPr algn="l"/>
-            <a:r>
-              <a:rPr sz="2600" b="1">
-                <a:solidFill>
-                  <a:srgbClr val="FFFFFF"/>
-                </a:solidFill>
-              </a:rPr>
-              <a:t>Key facts</a:t>
-            </a:r>
+          <p:cNvPr id="2" name="Rectangle 1"/>
+          <p:cNvSpPr/>
+          <p:nvPr/>
+        </p:nvSpPr>
+        <p:spPr>
+          <a:xfrm>
+            <a:off x="0" y="0"/>
+            <a:ext cx="12191695" cy="6858000"/>
+          </a:xfrm>
+          <a:prstGeom prst="rect">
+            <a:avLst/>
+          </a:prstGeom>
+          <a:solidFill>
+            <a:srgbClr val="18181B"/>
+          </a:solidFill>
+          <a:ln>
+            <a:noFill/>
+          </a:ln>
+        </p:spPr>
+        <p:style>
+          <a:lnRef idx="1">
+            <a:schemeClr val="accent1"/>
+          </a:lnRef>
+          <a:fillRef idx="3">
+            <a:schemeClr val="accent1"/>
+          </a:fillRef>
+          <a:effectRef idx="2">
+            <a:schemeClr val="accent1"/>
+          </a:effectRef>
+          <a:fontRef idx="minor">
+            <a:schemeClr val="lt1"/>
+          </a:fontRef>
+        </p:style>
+        <p:txBody>
+          <a:bodyPr rtlCol="0" anchor="ctr"/>
+          <a:lstStyle/>
+          <a:p>
+            <a:pPr algn="ctr"/>
           </a:p>
         </p:txBody>
       </p:sp>
@@ -4431,8 +5138,85 @@
         </p:nvSpPr>
         <p:spPr>
           <a:xfrm>
-            <a:off x="731520" y="1325880"/>
-            <a:ext cx="10789920" cy="27432"/>
+            <a:off x="0" y="0"/>
+            <a:ext cx="12191695" cy="54864"/>
+          </a:xfrm>
+          <a:prstGeom prst="rect">
+            <a:avLst/>
+          </a:prstGeom>
+          <a:solidFill>
+            <a:srgbClr val="6366F1"/>
+          </a:solidFill>
+          <a:ln>
+            <a:noFill/>
+          </a:ln>
+        </p:spPr>
+        <p:style>
+          <a:lnRef idx="1">
+            <a:schemeClr val="accent1"/>
+          </a:lnRef>
+          <a:fillRef idx="3">
+            <a:schemeClr val="accent1"/>
+          </a:fillRef>
+          <a:effectRef idx="2">
+            <a:schemeClr val="accent1"/>
+          </a:effectRef>
+          <a:fontRef idx="minor">
+            <a:schemeClr val="lt1"/>
+          </a:fontRef>
+        </p:style>
+        <p:txBody>
+          <a:bodyPr rtlCol="0" anchor="ctr"/>
+          <a:lstStyle/>
+          <a:p>
+            <a:pPr algn="ctr"/>
+          </a:p>
+        </p:txBody>
+      </p:sp>
+      <p:sp>
+        <p:nvSpPr>
+          <p:cNvPr id="4" name="TextBox 3"/>
+          <p:cNvSpPr txBox="1"/>
+          <p:nvPr/>
+        </p:nvSpPr>
+        <p:spPr>
+          <a:xfrm>
+            <a:off x="457200" y="164592"/>
+            <a:ext cx="11247120" cy="868680"/>
+          </a:xfrm>
+          <a:prstGeom prst="rect">
+            <a:avLst/>
+          </a:prstGeom>
+          <a:noFill/>
+        </p:spPr>
+        <p:txBody>
+          <a:bodyPr wrap="square">
+            <a:spAutoFit/>
+          </a:bodyPr>
+          <a:lstStyle/>
+          <a:p>
+            <a:pPr algn="l"/>
+            <a:r>
+              <a:rPr sz="2800" b="1">
+                <a:solidFill>
+                  <a:srgbClr val="FFFFFF"/>
+                </a:solidFill>
+              </a:rPr>
+              <a:t>Learning Objectives</a:t>
+            </a:r>
+          </a:p>
+        </p:txBody>
+      </p:sp>
+      <p:sp>
+        <p:nvSpPr>
+          <p:cNvPr id="5" name="Rectangle 4"/>
+          <p:cNvSpPr/>
+          <p:nvPr/>
+        </p:nvSpPr>
+        <p:spPr>
+          <a:xfrm>
+            <a:off x="457200" y="1143000"/>
+            <a:ext cx="11247120" cy="27432"/>
           </a:xfrm>
           <a:prstGeom prst="rect">
             <a:avLst/>
@@ -4468,14 +5252,14 @@
       </p:sp>
       <p:sp>
         <p:nvSpPr>
-          <p:cNvPr id="4" name="TextBox 3"/>
-          <p:cNvSpPr txBox="1"/>
-          <p:nvPr/>
-        </p:nvSpPr>
-        <p:spPr>
-          <a:xfrm>
-            <a:off x="868680" y="1600200"/>
-            <a:ext cx="10515600" cy="1005840"/>
+          <p:cNvPr id="6" name="TextBox 5"/>
+          <p:cNvSpPr txBox="1"/>
+          <p:nvPr/>
+        </p:nvSpPr>
+        <p:spPr>
+          <a:xfrm>
+            <a:off x="502920" y="1298448"/>
+            <a:ext cx="11155680" cy="914400"/>
           </a:xfrm>
           <a:prstGeom prst="rect">
             <a:avLst/>
@@ -4490,26 +5274,26 @@
           <a:p>
             <a:pPr algn="l"/>
             <a:r>
-              <a:rPr sz="1800" b="0">
+              <a:rPr sz="1700" b="0">
                 <a:solidFill>
                   <a:srgbClr val="FFFFFF"/>
                 </a:solidFill>
               </a:rPr>
-              <a:t>• OAuth 2.1 is a consolidation of OAuth 2.0 (RFC 6749) that makes PKCE mandatory for all grants and removes the implicit grant and resource owner password credent</a:t>
-            </a:r>
-          </a:p>
-        </p:txBody>
-      </p:sp>
-      <p:sp>
-        <p:nvSpPr>
-          <p:cNvPr id="5" name="TextBox 4"/>
-          <p:cNvSpPr txBox="1"/>
-          <p:nvPr/>
-        </p:nvSpPr>
-        <p:spPr>
-          <a:xfrm>
-            <a:off x="868680" y="2697480"/>
-            <a:ext cx="10515600" cy="1005840"/>
+              <a:t>▸  Explain what OAuth 2.1 changes from OAuth 2.0 and why those changes matter for MCP</a:t>
+            </a:r>
+          </a:p>
+        </p:txBody>
+      </p:sp>
+      <p:sp>
+        <p:nvSpPr>
+          <p:cNvPr id="7" name="TextBox 6"/>
+          <p:cNvSpPr txBox="1"/>
+          <p:nvPr/>
+        </p:nvSpPr>
+        <p:spPr>
+          <a:xfrm>
+            <a:off x="502920" y="2258568"/>
+            <a:ext cx="11155680" cy="914400"/>
           </a:xfrm>
           <a:prstGeom prst="rect">
             <a:avLst/>
@@ -4524,26 +5308,26 @@
           <a:p>
             <a:pPr algn="l"/>
             <a:r>
-              <a:rPr sz="1800" b="0">
+              <a:rPr sz="1700" b="0">
                 <a:solidFill>
                   <a:srgbClr val="FFFFFF"/>
                 </a:solidFill>
               </a:rPr>
-              <a:t>• DPoP (RFC 9449) adds a proof JWT to every token request and API call that binds the access token to the client's public key — making stolen tokens useless witho</a:t>
-            </a:r>
-          </a:p>
-        </p:txBody>
-      </p:sp>
-      <p:sp>
-        <p:nvSpPr>
-          <p:cNvPr id="6" name="TextBox 5"/>
-          <p:cNvSpPr txBox="1"/>
-          <p:nvPr/>
-        </p:nvSpPr>
-        <p:spPr>
-          <a:xfrm>
-            <a:off x="868680" y="3794760"/>
-            <a:ext cx="10515600" cy="1005840"/>
+              <a:t>▸  Describe DPoP (Demonstration of Proof-of-Possession) and why bearer tokens are insufficient</a:t>
+            </a:r>
+          </a:p>
+        </p:txBody>
+      </p:sp>
+      <p:sp>
+        <p:nvSpPr>
+          <p:cNvPr id="8" name="TextBox 7"/>
+          <p:cNvSpPr txBox="1"/>
+          <p:nvPr/>
+        </p:nvSpPr>
+        <p:spPr>
+          <a:xfrm>
+            <a:off x="502920" y="3218688"/>
+            <a:ext cx="11155680" cy="914400"/>
           </a:xfrm>
           <a:prstGeom prst="rect">
             <a:avLst/>
@@ -4558,26 +5342,26 @@
           <a:p>
             <a:pPr algn="l"/>
             <a:r>
-              <a:rPr sz="1800" b="0">
+              <a:rPr sz="1700" b="0">
                 <a:solidFill>
                   <a:srgbClr val="FFFFFF"/>
                 </a:solidFill>
               </a:rPr>
-              <a:t>• The MCP auth spec requires remote servers to expose a /.well-known/oauth-authorization-server metadata document (RFC 8414) that declares supported grant types,</a:t>
-            </a:r>
-          </a:p>
-        </p:txBody>
-      </p:sp>
-      <p:sp>
-        <p:nvSpPr>
-          <p:cNvPr id="7" name="TextBox 6"/>
-          <p:cNvSpPr txBox="1"/>
-          <p:nvPr/>
-        </p:nvSpPr>
-        <p:spPr>
-          <a:xfrm>
-            <a:off x="868680" y="4892040"/>
-            <a:ext cx="10515600" cy="1005840"/>
+              <a:t>▸  Implement an MCP server that validates DPoP-bound access tokens on every tools/call</a:t>
+            </a:r>
+          </a:p>
+        </p:txBody>
+      </p:sp>
+      <p:sp>
+        <p:nvSpPr>
+          <p:cNvPr id="9" name="TextBox 8"/>
+          <p:cNvSpPr txBox="1"/>
+          <p:nvPr/>
+        </p:nvSpPr>
+        <p:spPr>
+          <a:xfrm>
+            <a:off x="502920" y="4178808"/>
+            <a:ext cx="11155680" cy="914400"/>
           </a:xfrm>
           <a:prstGeom prst="rect">
             <a:avLst/>
@@ -4592,26 +5376,26 @@
           <a:p>
             <a:pPr algn="l"/>
             <a:r>
-              <a:rPr sz="1800" b="0">
+              <a:rPr sz="1700" b="0">
                 <a:solidFill>
                   <a:srgbClr val="FFFFFF"/>
                 </a:solidFill>
               </a:rPr>
-              <a:t>• Bearer token theft is a real attack vector in MCP deployments: prompt injection attacks can cause models to leak token values into tool call arguments; log aggr</a:t>
-            </a:r>
-          </a:p>
-        </p:txBody>
-      </p:sp>
-      <p:sp>
-        <p:nvSpPr>
-          <p:cNvPr id="8" name="TextBox 7"/>
-          <p:cNvSpPr txBox="1"/>
-          <p:nvPr/>
-        </p:nvSpPr>
-        <p:spPr>
-          <a:xfrm>
-            <a:off x="731520" y="6263640"/>
-            <a:ext cx="10698480" cy="320040"/>
+              <a:t>▸  Write the .well-known/oauth-authorization-server metadata endpoint required by the MCP auth spec</a:t>
+            </a:r>
+          </a:p>
+        </p:txBody>
+      </p:sp>
+      <p:sp>
+        <p:nvSpPr>
+          <p:cNvPr id="10" name="TextBox 9"/>
+          <p:cNvSpPr txBox="1"/>
+          <p:nvPr/>
+        </p:nvSpPr>
+        <p:spPr>
+          <a:xfrm>
+            <a:off x="457200" y="6492240"/>
+            <a:ext cx="11247120" cy="320040"/>
           </a:xfrm>
           <a:prstGeom prst="rect">
             <a:avLst/>
@@ -4647,14 +5431,6 @@
 <file path=ppt/slides/slide3.xml><?xml version="1.0" encoding="utf-8"?>
 <p:sld xmlns:a="http://schemas.openxmlformats.org/drawingml/2006/main" xmlns:p="http://schemas.openxmlformats.org/presentationml/2006/main" xmlns:r="http://schemas.openxmlformats.org/officeDocument/2006/relationships">
   <p:cSld>
-    <p:bg>
-      <p:bgPr>
-        <a:solidFill>
-          <a:srgbClr val="18181B"/>
-        </a:solidFill>
-        <a:effectLst/>
-      </p:bgPr>
-    </p:bg>
     <p:spTree>
       <p:nvGrpSpPr>
         <p:cNvPr id="1" name=""/>
@@ -4664,35 +5440,44 @@
       <p:grpSpPr/>
       <p:sp>
         <p:nvSpPr>
-          <p:cNvPr id="2" name="TextBox 1"/>
-          <p:cNvSpPr txBox="1"/>
-          <p:nvPr/>
-        </p:nvSpPr>
-        <p:spPr>
-          <a:xfrm>
-            <a:off x="731520" y="411480"/>
-            <a:ext cx="10789920" cy="822960"/>
-          </a:xfrm>
-          <a:prstGeom prst="rect">
-            <a:avLst/>
-          </a:prstGeom>
-          <a:noFill/>
-        </p:spPr>
-        <p:txBody>
-          <a:bodyPr wrap="square">
-            <a:spAutoFit/>
-          </a:bodyPr>
-          <a:lstStyle/>
-          <a:p>
-            <a:pPr algn="l"/>
-            <a:r>
-              <a:rPr sz="2600" b="1">
-                <a:solidFill>
-                  <a:srgbClr val="FFFFFF"/>
-                </a:solidFill>
-              </a:rPr>
-              <a:t>Key facts (2)</a:t>
-            </a:r>
+          <p:cNvPr id="2" name="Rectangle 1"/>
+          <p:cNvSpPr/>
+          <p:nvPr/>
+        </p:nvSpPr>
+        <p:spPr>
+          <a:xfrm>
+            <a:off x="0" y="0"/>
+            <a:ext cx="12191695" cy="6858000"/>
+          </a:xfrm>
+          <a:prstGeom prst="rect">
+            <a:avLst/>
+          </a:prstGeom>
+          <a:solidFill>
+            <a:srgbClr val="18181B"/>
+          </a:solidFill>
+          <a:ln>
+            <a:noFill/>
+          </a:ln>
+        </p:spPr>
+        <p:style>
+          <a:lnRef idx="1">
+            <a:schemeClr val="accent1"/>
+          </a:lnRef>
+          <a:fillRef idx="3">
+            <a:schemeClr val="accent1"/>
+          </a:fillRef>
+          <a:effectRef idx="2">
+            <a:schemeClr val="accent1"/>
+          </a:effectRef>
+          <a:fontRef idx="minor">
+            <a:schemeClr val="lt1"/>
+          </a:fontRef>
+        </p:style>
+        <p:txBody>
+          <a:bodyPr rtlCol="0" anchor="ctr"/>
+          <a:lstStyle/>
+          <a:p>
+            <a:pPr algn="ctr"/>
           </a:p>
         </p:txBody>
       </p:sp>
@@ -4704,8 +5489,85 @@
         </p:nvSpPr>
         <p:spPr>
           <a:xfrm>
-            <a:off x="731520" y="1325880"/>
-            <a:ext cx="10789920" cy="27432"/>
+            <a:off x="0" y="0"/>
+            <a:ext cx="12191695" cy="54864"/>
+          </a:xfrm>
+          <a:prstGeom prst="rect">
+            <a:avLst/>
+          </a:prstGeom>
+          <a:solidFill>
+            <a:srgbClr val="6366F1"/>
+          </a:solidFill>
+          <a:ln>
+            <a:noFill/>
+          </a:ln>
+        </p:spPr>
+        <p:style>
+          <a:lnRef idx="1">
+            <a:schemeClr val="accent1"/>
+          </a:lnRef>
+          <a:fillRef idx="3">
+            <a:schemeClr val="accent1"/>
+          </a:fillRef>
+          <a:effectRef idx="2">
+            <a:schemeClr val="accent1"/>
+          </a:effectRef>
+          <a:fontRef idx="minor">
+            <a:schemeClr val="lt1"/>
+          </a:fontRef>
+        </p:style>
+        <p:txBody>
+          <a:bodyPr rtlCol="0" anchor="ctr"/>
+          <a:lstStyle/>
+          <a:p>
+            <a:pPr algn="ctr"/>
+          </a:p>
+        </p:txBody>
+      </p:sp>
+      <p:sp>
+        <p:nvSpPr>
+          <p:cNvPr id="4" name="TextBox 3"/>
+          <p:cNvSpPr txBox="1"/>
+          <p:nvPr/>
+        </p:nvSpPr>
+        <p:spPr>
+          <a:xfrm>
+            <a:off x="457200" y="164592"/>
+            <a:ext cx="11247120" cy="868680"/>
+          </a:xfrm>
+          <a:prstGeom prst="rect">
+            <a:avLst/>
+          </a:prstGeom>
+          <a:noFill/>
+        </p:spPr>
+        <p:txBody>
+          <a:bodyPr wrap="square">
+            <a:spAutoFit/>
+          </a:bodyPr>
+          <a:lstStyle/>
+          <a:p>
+            <a:pPr algn="l"/>
+            <a:r>
+              <a:rPr sz="2800" b="1">
+                <a:solidFill>
+                  <a:srgbClr val="FFFFFF"/>
+                </a:solidFill>
+              </a:rPr>
+              <a:t>The Auth Problem MCP Initially Left Open</a:t>
+            </a:r>
+          </a:p>
+        </p:txBody>
+      </p:sp>
+      <p:sp>
+        <p:nvSpPr>
+          <p:cNvPr id="5" name="Rectangle 4"/>
+          <p:cNvSpPr/>
+          <p:nvPr/>
+        </p:nvSpPr>
+        <p:spPr>
+          <a:xfrm>
+            <a:off x="457200" y="1143000"/>
+            <a:ext cx="11247120" cy="27432"/>
           </a:xfrm>
           <a:prstGeom prst="rect">
             <a:avLst/>
@@ -4741,14 +5603,14 @@
       </p:sp>
       <p:sp>
         <p:nvSpPr>
-          <p:cNvPr id="4" name="TextBox 3"/>
-          <p:cNvSpPr txBox="1"/>
-          <p:nvPr/>
-        </p:nvSpPr>
-        <p:spPr>
-          <a:xfrm>
-            <a:off x="868680" y="1600200"/>
-            <a:ext cx="10515600" cy="1005840"/>
+          <p:cNvPr id="6" name="TextBox 5"/>
+          <p:cNvSpPr txBox="1"/>
+          <p:nvPr/>
+        </p:nvSpPr>
+        <p:spPr>
+          <a:xfrm>
+            <a:off x="502920" y="1298448"/>
+            <a:ext cx="11155680" cy="777240"/>
           </a:xfrm>
           <a:prstGeom prst="rect">
             <a:avLst/>
@@ -4763,26 +5625,26 @@
           <a:p>
             <a:pPr algn="l"/>
             <a:r>
-              <a:rPr sz="1800" b="0">
+              <a:rPr sz="1500" b="0">
                 <a:solidFill>
                   <a:srgbClr val="FFFFFF"/>
                 </a:solidFill>
               </a:rPr>
-              <a:t>• SEP-1932 (DPoP) and SEP-1933 (Workload Identity Federation) are listed on the MCP roadmap as "On the Horizon" — community-driven work that maintainers are not y</a:t>
-            </a:r>
-          </a:p>
-        </p:txBody>
-      </p:sp>
-      <p:sp>
-        <p:nvSpPr>
-          <p:cNvPr id="5" name="TextBox 4"/>
-          <p:cNvSpPr txBox="1"/>
-          <p:nvPr/>
-        </p:nvSpPr>
-        <p:spPr>
-          <a:xfrm>
-            <a:off x="868680" y="2697480"/>
-            <a:ext cx="10515600" cy="1005840"/>
+              <a:t>▸  Initial MCP spec: stdio security via OS-level process isolation; HTTP auth left to implementors</a:t>
+            </a:r>
+          </a:p>
+        </p:txBody>
+      </p:sp>
+      <p:sp>
+        <p:nvSpPr>
+          <p:cNvPr id="7" name="TextBox 6"/>
+          <p:cNvSpPr txBox="1"/>
+          <p:nvPr/>
+        </p:nvSpPr>
+        <p:spPr>
+          <a:xfrm>
+            <a:off x="502920" y="2121408"/>
+            <a:ext cx="11155680" cy="777240"/>
           </a:xfrm>
           <a:prstGeom prst="rect">
             <a:avLst/>
@@ -4797,26 +5659,128 @@
           <a:p>
             <a:pPr algn="l"/>
             <a:r>
-              <a:rPr sz="1800" b="0">
+              <a:rPr sz="1500" b="0">
                 <a:solidFill>
                   <a:srgbClr val="FFFFFF"/>
                 </a:solidFill>
               </a:rPr>
-              <a:t>• For stdio servers: auth is process-level; the OS enforces that only the parent process can read from the subprocess's stdout. OAuth is only required for HTTP tr</a:t>
-            </a:r>
-          </a:p>
-        </p:txBody>
-      </p:sp>
-      <p:sp>
-        <p:nvSpPr>
-          <p:cNvPr id="6" name="TextBox 5"/>
-          <p:cNvSpPr txBox="1"/>
-          <p:nvPr/>
-        </p:nvSpPr>
-        <p:spPr>
-          <a:xfrm>
-            <a:off x="731520" y="6263640"/>
-            <a:ext cx="10698480" cy="320040"/>
+              <a:t>▸  Bearer tokens in HTTP deployments leaked via logs, prompt injection, and multi-tenant misconfiguration</a:t>
+            </a:r>
+          </a:p>
+        </p:txBody>
+      </p:sp>
+      <p:sp>
+        <p:nvSpPr>
+          <p:cNvPr id="8" name="TextBox 7"/>
+          <p:cNvSpPr txBox="1"/>
+          <p:nvPr/>
+        </p:nvSpPr>
+        <p:spPr>
+          <a:xfrm>
+            <a:off x="502920" y="2944368"/>
+            <a:ext cx="11155680" cy="777240"/>
+          </a:xfrm>
+          <a:prstGeom prst="rect">
+            <a:avLst/>
+          </a:prstGeom>
+          <a:noFill/>
+        </p:spPr>
+        <p:txBody>
+          <a:bodyPr wrap="square">
+            <a:spAutoFit/>
+          </a:bodyPr>
+          <a:lstStyle/>
+          <a:p>
+            <a:pPr algn="l"/>
+            <a:r>
+              <a:rPr sz="1500" b="0">
+                <a:solidFill>
+                  <a:srgbClr val="FFFFFF"/>
+                </a:solidFill>
+              </a:rPr>
+              <a:t>▸  Prompt injection causes models to echo Authorization header values into tool call responses</a:t>
+            </a:r>
+          </a:p>
+        </p:txBody>
+      </p:sp>
+      <p:sp>
+        <p:nvSpPr>
+          <p:cNvPr id="9" name="TextBox 8"/>
+          <p:cNvSpPr txBox="1"/>
+          <p:nvPr/>
+        </p:nvSpPr>
+        <p:spPr>
+          <a:xfrm>
+            <a:off x="502920" y="3767328"/>
+            <a:ext cx="11155680" cy="777240"/>
+          </a:xfrm>
+          <a:prstGeom prst="rect">
+            <a:avLst/>
+          </a:prstGeom>
+          <a:noFill/>
+        </p:spPr>
+        <p:txBody>
+          <a:bodyPr wrap="square">
+            <a:spAutoFit/>
+          </a:bodyPr>
+          <a:lstStyle/>
+          <a:p>
+            <a:pPr algn="l"/>
+            <a:r>
+              <a:rPr sz="1500" b="0">
+                <a:solidFill>
+                  <a:srgbClr val="FFFFFF"/>
+                </a:solidFill>
+              </a:rPr>
+              <a:t>▸  SEP-1932 (DPoP) and SEP-1933 (Workload Identity) are on the 2026 roadmap to close these gaps</a:t>
+            </a:r>
+          </a:p>
+        </p:txBody>
+      </p:sp>
+      <p:sp>
+        <p:nvSpPr>
+          <p:cNvPr id="10" name="TextBox 9"/>
+          <p:cNvSpPr txBox="1"/>
+          <p:nvPr/>
+        </p:nvSpPr>
+        <p:spPr>
+          <a:xfrm>
+            <a:off x="502920" y="4590288"/>
+            <a:ext cx="11155680" cy="777240"/>
+          </a:xfrm>
+          <a:prstGeom prst="rect">
+            <a:avLst/>
+          </a:prstGeom>
+          <a:noFill/>
+        </p:spPr>
+        <p:txBody>
+          <a:bodyPr wrap="square">
+            <a:spAutoFit/>
+          </a:bodyPr>
+          <a:lstStyle/>
+          <a:p>
+            <a:pPr algn="l"/>
+            <a:r>
+              <a:rPr sz="1500" b="0">
+                <a:solidFill>
+                  <a:srgbClr val="FFFFFF"/>
+                </a:solidFill>
+              </a:rPr>
+              <a:t>▸  OAuth is not required for stdio servers — only HTTP transport needs explicit auth enforcement</a:t>
+            </a:r>
+          </a:p>
+        </p:txBody>
+      </p:sp>
+      <p:sp>
+        <p:nvSpPr>
+          <p:cNvPr id="11" name="TextBox 10"/>
+          <p:cNvSpPr txBox="1"/>
+          <p:nvPr/>
+        </p:nvSpPr>
+        <p:spPr>
+          <a:xfrm>
+            <a:off x="457200" y="6492240"/>
+            <a:ext cx="11247120" cy="320040"/>
           </a:xfrm>
           <a:prstGeom prst="rect">
             <a:avLst/>
@@ -4852,14 +5816,6 @@
 <file path=ppt/slides/slide4.xml><?xml version="1.0" encoding="utf-8"?>
 <p:sld xmlns:a="http://schemas.openxmlformats.org/drawingml/2006/main" xmlns:p="http://schemas.openxmlformats.org/presentationml/2006/main" xmlns:r="http://schemas.openxmlformats.org/officeDocument/2006/relationships">
   <p:cSld>
-    <p:bg>
-      <p:bgPr>
-        <a:solidFill>
-          <a:srgbClr val="18181B"/>
-        </a:solidFill>
-        <a:effectLst/>
-      </p:bgPr>
-    </p:bg>
     <p:spTree>
       <p:nvGrpSpPr>
         <p:cNvPr id="1" name=""/>
@@ -4869,35 +5825,44 @@
       <p:grpSpPr/>
       <p:sp>
         <p:nvSpPr>
-          <p:cNvPr id="2" name="TextBox 1"/>
-          <p:cNvSpPr txBox="1"/>
-          <p:nvPr/>
-        </p:nvSpPr>
-        <p:spPr>
-          <a:xfrm>
-            <a:off x="731520" y="411480"/>
-            <a:ext cx="10789920" cy="822960"/>
-          </a:xfrm>
-          <a:prstGeom prst="rect">
-            <a:avLst/>
-          </a:prstGeom>
-          <a:noFill/>
-        </p:spPr>
-        <p:txBody>
-          <a:bodyPr wrap="square">
-            <a:spAutoFit/>
-          </a:bodyPr>
-          <a:lstStyle/>
-          <a:p>
-            <a:pPr algn="l"/>
-            <a:r>
-              <a:rPr sz="2600" b="1">
-                <a:solidFill>
-                  <a:srgbClr val="FFFFFF"/>
-                </a:solidFill>
-              </a:rPr>
-              <a:t>The authentication problem MCP solved badly at first</a:t>
-            </a:r>
+          <p:cNvPr id="2" name="Rectangle 1"/>
+          <p:cNvSpPr/>
+          <p:nvPr/>
+        </p:nvSpPr>
+        <p:spPr>
+          <a:xfrm>
+            <a:off x="0" y="0"/>
+            <a:ext cx="12191695" cy="6858000"/>
+          </a:xfrm>
+          <a:prstGeom prst="rect">
+            <a:avLst/>
+          </a:prstGeom>
+          <a:solidFill>
+            <a:srgbClr val="18181B"/>
+          </a:solidFill>
+          <a:ln>
+            <a:noFill/>
+          </a:ln>
+        </p:spPr>
+        <p:style>
+          <a:lnRef idx="1">
+            <a:schemeClr val="accent1"/>
+          </a:lnRef>
+          <a:fillRef idx="3">
+            <a:schemeClr val="accent1"/>
+          </a:fillRef>
+          <a:effectRef idx="2">
+            <a:schemeClr val="accent1"/>
+          </a:effectRef>
+          <a:fontRef idx="minor">
+            <a:schemeClr val="lt1"/>
+          </a:fontRef>
+        </p:style>
+        <p:txBody>
+          <a:bodyPr rtlCol="0" anchor="ctr"/>
+          <a:lstStyle/>
+          <a:p>
+            <a:pPr algn="ctr"/>
           </a:p>
         </p:txBody>
       </p:sp>
@@ -4909,8 +5874,85 @@
         </p:nvSpPr>
         <p:spPr>
           <a:xfrm>
-            <a:off x="731520" y="1325880"/>
-            <a:ext cx="10789920" cy="27432"/>
+            <a:off x="0" y="0"/>
+            <a:ext cx="12191695" cy="54864"/>
+          </a:xfrm>
+          <a:prstGeom prst="rect">
+            <a:avLst/>
+          </a:prstGeom>
+          <a:solidFill>
+            <a:srgbClr val="6366F1"/>
+          </a:solidFill>
+          <a:ln>
+            <a:noFill/>
+          </a:ln>
+        </p:spPr>
+        <p:style>
+          <a:lnRef idx="1">
+            <a:schemeClr val="accent1"/>
+          </a:lnRef>
+          <a:fillRef idx="3">
+            <a:schemeClr val="accent1"/>
+          </a:fillRef>
+          <a:effectRef idx="2">
+            <a:schemeClr val="accent1"/>
+          </a:effectRef>
+          <a:fontRef idx="minor">
+            <a:schemeClr val="lt1"/>
+          </a:fontRef>
+        </p:style>
+        <p:txBody>
+          <a:bodyPr rtlCol="0" anchor="ctr"/>
+          <a:lstStyle/>
+          <a:p>
+            <a:pPr algn="ctr"/>
+          </a:p>
+        </p:txBody>
+      </p:sp>
+      <p:sp>
+        <p:nvSpPr>
+          <p:cNvPr id="4" name="TextBox 3"/>
+          <p:cNvSpPr txBox="1"/>
+          <p:nvPr/>
+        </p:nvSpPr>
+        <p:spPr>
+          <a:xfrm>
+            <a:off x="457200" y="164592"/>
+            <a:ext cx="11247120" cy="868680"/>
+          </a:xfrm>
+          <a:prstGeom prst="rect">
+            <a:avLst/>
+          </a:prstGeom>
+          <a:noFill/>
+        </p:spPr>
+        <p:txBody>
+          <a:bodyPr wrap="square">
+            <a:spAutoFit/>
+          </a:bodyPr>
+          <a:lstStyle/>
+          <a:p>
+            <a:pPr algn="l"/>
+            <a:r>
+              <a:rPr sz="2800" b="1">
+                <a:solidFill>
+                  <a:srgbClr val="FFFFFF"/>
+                </a:solidFill>
+              </a:rPr>
+              <a:t>OAuth 2.1 — What Changed from OAuth 2.0</a:t>
+            </a:r>
+          </a:p>
+        </p:txBody>
+      </p:sp>
+      <p:sp>
+        <p:nvSpPr>
+          <p:cNvPr id="5" name="Rectangle 4"/>
+          <p:cNvSpPr/>
+          <p:nvPr/>
+        </p:nvSpPr>
+        <p:spPr>
+          <a:xfrm>
+            <a:off x="457200" y="1143000"/>
+            <a:ext cx="11247120" cy="27432"/>
           </a:xfrm>
           <a:prstGeom prst="rect">
             <a:avLst/>
@@ -4946,14 +5988,14 @@
       </p:sp>
       <p:sp>
         <p:nvSpPr>
-          <p:cNvPr id="4" name="TextBox 3"/>
-          <p:cNvSpPr txBox="1"/>
-          <p:nvPr/>
-        </p:nvSpPr>
-        <p:spPr>
-          <a:xfrm>
-            <a:off x="868680" y="1600200"/>
-            <a:ext cx="10515600" cy="1005840"/>
+          <p:cNvPr id="6" name="TextBox 5"/>
+          <p:cNvSpPr txBox="1"/>
+          <p:nvPr/>
+        </p:nvSpPr>
+        <p:spPr>
+          <a:xfrm>
+            <a:off x="502920" y="1298448"/>
+            <a:ext cx="11155680" cy="777240"/>
           </a:xfrm>
           <a:prstGeom prst="rect">
             <a:avLst/>
@@ -4968,26 +6010,26 @@
           <a:p>
             <a:pPr algn="l"/>
             <a:r>
-              <a:rPr sz="1800" b="0">
+              <a:rPr sz="1500" b="0">
                 <a:solidFill>
                   <a:srgbClr val="FFFFFF"/>
                 </a:solidFill>
               </a:rPr>
-              <a:t>• The initial MCP specification shipped with a minimal auth story: for stdio servers, security came from process-level isolation (only the host that launched the</a:t>
-            </a:r>
-          </a:p>
-        </p:txBody>
-      </p:sp>
-      <p:sp>
-        <p:nvSpPr>
-          <p:cNvPr id="5" name="TextBox 4"/>
-          <p:cNvSpPr txBox="1"/>
-          <p:nvPr/>
-        </p:nvSpPr>
-        <p:spPr>
-          <a:xfrm>
-            <a:off x="868680" y="2697480"/>
-            <a:ext cx="10515600" cy="1005840"/>
+              <a:t>▸  PKCE (Proof Key for Code Exchange) is now mandatory for ALL authorization code grants</a:t>
+            </a:r>
+          </a:p>
+        </p:txBody>
+      </p:sp>
+      <p:sp>
+        <p:nvSpPr>
+          <p:cNvPr id="7" name="TextBox 6"/>
+          <p:cNvSpPr txBox="1"/>
+          <p:nvPr/>
+        </p:nvSpPr>
+        <p:spPr>
+          <a:xfrm>
+            <a:off x="502920" y="2121408"/>
+            <a:ext cx="11155680" cy="777240"/>
           </a:xfrm>
           <a:prstGeom prst="rect">
             <a:avLst/>
@@ -5002,26 +6044,26 @@
           <a:p>
             <a:pPr algn="l"/>
             <a:r>
-              <a:rPr sz="1800" b="0">
+              <a:rPr sz="1500" b="0">
                 <a:solidFill>
                   <a:srgbClr val="FFFFFF"/>
                 </a:solidFill>
               </a:rPr>
-              <a:t>• That gap creates real problems in HTTP deployments.</a:t>
-            </a:r>
-          </a:p>
-        </p:txBody>
-      </p:sp>
-      <p:sp>
-        <p:nvSpPr>
-          <p:cNvPr id="6" name="TextBox 5"/>
-          <p:cNvSpPr txBox="1"/>
-          <p:nvPr/>
-        </p:nvSpPr>
-        <p:spPr>
-          <a:xfrm>
-            <a:off x="868680" y="3794760"/>
-            <a:ext cx="10515600" cy="1005840"/>
+              <a:t>▸  The implicit grant is removed — tokens in URL fragments exposed to browser history and logs</a:t>
+            </a:r>
+          </a:p>
+        </p:txBody>
+      </p:sp>
+      <p:sp>
+        <p:nvSpPr>
+          <p:cNvPr id="8" name="TextBox 7"/>
+          <p:cNvSpPr txBox="1"/>
+          <p:nvPr/>
+        </p:nvSpPr>
+        <p:spPr>
+          <a:xfrm>
+            <a:off x="502920" y="2944368"/>
+            <a:ext cx="11155680" cy="777240"/>
           </a:xfrm>
           <a:prstGeom prst="rect">
             <a:avLst/>
@@ -5036,26 +6078,26 @@
           <a:p>
             <a:pPr algn="l"/>
             <a:r>
-              <a:rPr sz="1800" b="0">
+              <a:rPr sz="1500" b="0">
                 <a:solidFill>
                   <a:srgbClr val="FFFFFF"/>
                 </a:solidFill>
               </a:rPr>
-              <a:t>• The 2026 roadmap lists two SEPs (Specification Enhancement Proposals) to address this:</a:t>
-            </a:r>
-          </a:p>
-        </p:txBody>
-      </p:sp>
-      <p:sp>
-        <p:nvSpPr>
-          <p:cNvPr id="7" name="TextBox 6"/>
-          <p:cNvSpPr txBox="1"/>
-          <p:nvPr/>
-        </p:nvSpPr>
-        <p:spPr>
-          <a:xfrm>
-            <a:off x="868680" y="4892040"/>
-            <a:ext cx="10515600" cy="1005840"/>
+              <a:t>▸  Resource Owner Password Credentials grant is removed entirely</a:t>
+            </a:r>
+          </a:p>
+        </p:txBody>
+      </p:sp>
+      <p:sp>
+        <p:nvSpPr>
+          <p:cNvPr id="9" name="TextBox 8"/>
+          <p:cNvSpPr txBox="1"/>
+          <p:nvPr/>
+        </p:nvSpPr>
+        <p:spPr>
+          <a:xfrm>
+            <a:off x="502920" y="3767328"/>
+            <a:ext cx="11155680" cy="777240"/>
           </a:xfrm>
           <a:prstGeom prst="rect">
             <a:avLst/>
@@ -5070,26 +6112,60 @@
           <a:p>
             <a:pPr algn="l"/>
             <a:r>
-              <a:rPr sz="1800" b="0">
+              <a:rPr sz="1500" b="0">
                 <a:solidFill>
                   <a:srgbClr val="FFFFFF"/>
                 </a:solidFill>
               </a:rPr>
-              <a:t>• SEP-1932: DPoP (Demonstration of Proof-of-Possession) as the mandatory binding mechanism for access tokens on remote MCP servers</a:t>
-            </a:r>
-          </a:p>
-        </p:txBody>
-      </p:sp>
-      <p:sp>
-        <p:nvSpPr>
-          <p:cNvPr id="8" name="TextBox 7"/>
-          <p:cNvSpPr txBox="1"/>
-          <p:nvPr/>
-        </p:nvSpPr>
-        <p:spPr>
-          <a:xfrm>
-            <a:off x="731520" y="6263640"/>
-            <a:ext cx="10698480" cy="320040"/>
+              <a:t>▸  Short-lived access tokens + one-time-use refresh token rotation are now required</a:t>
+            </a:r>
+          </a:p>
+        </p:txBody>
+      </p:sp>
+      <p:sp>
+        <p:nvSpPr>
+          <p:cNvPr id="10" name="TextBox 9"/>
+          <p:cNvSpPr txBox="1"/>
+          <p:nvPr/>
+        </p:nvSpPr>
+        <p:spPr>
+          <a:xfrm>
+            <a:off x="502920" y="4590288"/>
+            <a:ext cx="11155680" cy="777240"/>
+          </a:xfrm>
+          <a:prstGeom prst="rect">
+            <a:avLst/>
+          </a:prstGeom>
+          <a:noFill/>
+        </p:spPr>
+        <p:txBody>
+          <a:bodyPr wrap="square">
+            <a:spAutoFit/>
+          </a:bodyPr>
+          <a:lstStyle/>
+          <a:p>
+            <a:pPr algn="l"/>
+            <a:r>
+              <a:rPr sz="1500" b="0">
+                <a:solidFill>
+                  <a:srgbClr val="FFFFFF"/>
+                </a:solidFill>
+              </a:rPr>
+              <a:t>▸  MCP clients must handle mid-session token expiry and proactive refresh during 30+ min agent runs</a:t>
+            </a:r>
+          </a:p>
+        </p:txBody>
+      </p:sp>
+      <p:sp>
+        <p:nvSpPr>
+          <p:cNvPr id="11" name="TextBox 10"/>
+          <p:cNvSpPr txBox="1"/>
+          <p:nvPr/>
+        </p:nvSpPr>
+        <p:spPr>
+          <a:xfrm>
+            <a:off x="457200" y="6492240"/>
+            <a:ext cx="11247120" cy="320040"/>
           </a:xfrm>
           <a:prstGeom prst="rect">
             <a:avLst/>
@@ -5125,14 +6201,6 @@
 <file path=ppt/slides/slide5.xml><?xml version="1.0" encoding="utf-8"?>
 <p:sld xmlns:a="http://schemas.openxmlformats.org/drawingml/2006/main" xmlns:p="http://schemas.openxmlformats.org/presentationml/2006/main" xmlns:r="http://schemas.openxmlformats.org/officeDocument/2006/relationships">
   <p:cSld>
-    <p:bg>
-      <p:bgPr>
-        <a:solidFill>
-          <a:srgbClr val="18181B"/>
-        </a:solidFill>
-        <a:effectLst/>
-      </p:bgPr>
-    </p:bg>
     <p:spTree>
       <p:nvGrpSpPr>
         <p:cNvPr id="1" name=""/>
@@ -5142,35 +6210,44 @@
       <p:grpSpPr/>
       <p:sp>
         <p:nvSpPr>
-          <p:cNvPr id="2" name="TextBox 1"/>
-          <p:cNvSpPr txBox="1"/>
-          <p:nvPr/>
-        </p:nvSpPr>
-        <p:spPr>
-          <a:xfrm>
-            <a:off x="731520" y="411480"/>
-            <a:ext cx="10789920" cy="822960"/>
-          </a:xfrm>
-          <a:prstGeom prst="rect">
-            <a:avLst/>
-          </a:prstGeom>
-          <a:noFill/>
-        </p:spPr>
-        <p:txBody>
-          <a:bodyPr wrap="square">
-            <a:spAutoFit/>
-          </a:bodyPr>
-          <a:lstStyle/>
-          <a:p>
-            <a:pPr algn="l"/>
-            <a:r>
-              <a:rPr sz="2600" b="1">
-                <a:solidFill>
-                  <a:srgbClr val="FFFFFF"/>
-                </a:solidFill>
-              </a:rPr>
-              <a:t>The authentication problem MCP solved badly at first (2)</a:t>
-            </a:r>
+          <p:cNvPr id="2" name="Rectangle 1"/>
+          <p:cNvSpPr/>
+          <p:nvPr/>
+        </p:nvSpPr>
+        <p:spPr>
+          <a:xfrm>
+            <a:off x="0" y="0"/>
+            <a:ext cx="12191695" cy="6858000"/>
+          </a:xfrm>
+          <a:prstGeom prst="rect">
+            <a:avLst/>
+          </a:prstGeom>
+          <a:solidFill>
+            <a:srgbClr val="18181B"/>
+          </a:solidFill>
+          <a:ln>
+            <a:noFill/>
+          </a:ln>
+        </p:spPr>
+        <p:style>
+          <a:lnRef idx="1">
+            <a:schemeClr val="accent1"/>
+          </a:lnRef>
+          <a:fillRef idx="3">
+            <a:schemeClr val="accent1"/>
+          </a:fillRef>
+          <a:effectRef idx="2">
+            <a:schemeClr val="accent1"/>
+          </a:effectRef>
+          <a:fontRef idx="minor">
+            <a:schemeClr val="lt1"/>
+          </a:fontRef>
+        </p:style>
+        <p:txBody>
+          <a:bodyPr rtlCol="0" anchor="ctr"/>
+          <a:lstStyle/>
+          <a:p>
+            <a:pPr algn="ctr"/>
           </a:p>
         </p:txBody>
       </p:sp>
@@ -5182,8 +6259,85 @@
         </p:nvSpPr>
         <p:spPr>
           <a:xfrm>
-            <a:off x="731520" y="1325880"/>
-            <a:ext cx="10789920" cy="27432"/>
+            <a:off x="0" y="0"/>
+            <a:ext cx="12191695" cy="54864"/>
+          </a:xfrm>
+          <a:prstGeom prst="rect">
+            <a:avLst/>
+          </a:prstGeom>
+          <a:solidFill>
+            <a:srgbClr val="6366F1"/>
+          </a:solidFill>
+          <a:ln>
+            <a:noFill/>
+          </a:ln>
+        </p:spPr>
+        <p:style>
+          <a:lnRef idx="1">
+            <a:schemeClr val="accent1"/>
+          </a:lnRef>
+          <a:fillRef idx="3">
+            <a:schemeClr val="accent1"/>
+          </a:fillRef>
+          <a:effectRef idx="2">
+            <a:schemeClr val="accent1"/>
+          </a:effectRef>
+          <a:fontRef idx="minor">
+            <a:schemeClr val="lt1"/>
+          </a:fontRef>
+        </p:style>
+        <p:txBody>
+          <a:bodyPr rtlCol="0" anchor="ctr"/>
+          <a:lstStyle/>
+          <a:p>
+            <a:pPr algn="ctr"/>
+          </a:p>
+        </p:txBody>
+      </p:sp>
+      <p:sp>
+        <p:nvSpPr>
+          <p:cNvPr id="4" name="TextBox 3"/>
+          <p:cNvSpPr txBox="1"/>
+          <p:nvPr/>
+        </p:nvSpPr>
+        <p:spPr>
+          <a:xfrm>
+            <a:off x="457200" y="164592"/>
+            <a:ext cx="11247120" cy="868680"/>
+          </a:xfrm>
+          <a:prstGeom prst="rect">
+            <a:avLst/>
+          </a:prstGeom>
+          <a:noFill/>
+        </p:spPr>
+        <p:txBody>
+          <a:bodyPr wrap="square">
+            <a:spAutoFit/>
+          </a:bodyPr>
+          <a:lstStyle/>
+          <a:p>
+            <a:pPr algn="l"/>
+            <a:r>
+              <a:rPr sz="2800" b="1">
+                <a:solidFill>
+                  <a:srgbClr val="FFFFFF"/>
+                </a:solidFill>
+              </a:rPr>
+              <a:t>PKCE — Preventing Authorization Code Interception</a:t>
+            </a:r>
+          </a:p>
+        </p:txBody>
+      </p:sp>
+      <p:sp>
+        <p:nvSpPr>
+          <p:cNvPr id="5" name="Rectangle 4"/>
+          <p:cNvSpPr/>
+          <p:nvPr/>
+        </p:nvSpPr>
+        <p:spPr>
+          <a:xfrm>
+            <a:off x="457200" y="1143000"/>
+            <a:ext cx="11247120" cy="27432"/>
           </a:xfrm>
           <a:prstGeom prst="rect">
             <a:avLst/>
@@ -5219,14 +6373,14 @@
       </p:sp>
       <p:sp>
         <p:nvSpPr>
-          <p:cNvPr id="4" name="TextBox 3"/>
-          <p:cNvSpPr txBox="1"/>
-          <p:nvPr/>
-        </p:nvSpPr>
-        <p:spPr>
-          <a:xfrm>
-            <a:off x="868680" y="1600200"/>
-            <a:ext cx="10515600" cy="1005840"/>
+          <p:cNvPr id="6" name="TextBox 5"/>
+          <p:cNvSpPr txBox="1"/>
+          <p:nvPr/>
+        </p:nvSpPr>
+        <p:spPr>
+          <a:xfrm>
+            <a:off x="502920" y="1298448"/>
+            <a:ext cx="11155680" cy="777240"/>
           </a:xfrm>
           <a:prstGeom prst="rect">
             <a:avLst/>
@@ -5241,26 +6395,26 @@
           <a:p>
             <a:pPr algn="l"/>
             <a:r>
-              <a:rPr sz="1800" b="0">
+              <a:rPr sz="1500" b="0">
                 <a:solidFill>
                   <a:srgbClr val="FFFFFF"/>
                 </a:solidFill>
               </a:rPr>
-              <a:t>• SEP-1933: Workload Identity Federation for machine-to-machine MCP server access</a:t>
-            </a:r>
-          </a:p>
-        </p:txBody>
-      </p:sp>
-      <p:sp>
-        <p:nvSpPr>
-          <p:cNvPr id="5" name="TextBox 4"/>
-          <p:cNvSpPr txBox="1"/>
-          <p:nvPr/>
-        </p:nvSpPr>
-        <p:spPr>
-          <a:xfrm>
-            <a:off x="868680" y="2697480"/>
-            <a:ext cx="10515600" cy="1005840"/>
+              <a:t>▸  Client generates a random code_verifier (43-128 chars), computes code_challenge = SHA256(verifier)</a:t>
+            </a:r>
+          </a:p>
+        </p:txBody>
+      </p:sp>
+      <p:sp>
+        <p:nvSpPr>
+          <p:cNvPr id="7" name="TextBox 6"/>
+          <p:cNvSpPr txBox="1"/>
+          <p:nvPr/>
+        </p:nvSpPr>
+        <p:spPr>
+          <a:xfrm>
+            <a:off x="502920" y="2121408"/>
+            <a:ext cx="11155680" cy="777240"/>
           </a:xfrm>
           <a:prstGeom prst="rect">
             <a:avLst/>
@@ -5275,26 +6429,128 @@
           <a:p>
             <a:pPr algn="l"/>
             <a:r>
-              <a:rPr sz="1800" b="0">
+              <a:rPr sz="1500" b="0">
                 <a:solidFill>
                   <a:srgbClr val="FFFFFF"/>
                 </a:solidFill>
               </a:rPr>
-              <a:t>• This chapter covers both the current auth spec and the SEP-1932 design so you're building for where the protocol is going, not where it was.</a:t>
-            </a:r>
-          </a:p>
-        </p:txBody>
-      </p:sp>
-      <p:sp>
-        <p:nvSpPr>
-          <p:cNvPr id="6" name="TextBox 5"/>
-          <p:cNvSpPr txBox="1"/>
-          <p:nvPr/>
-        </p:nvSpPr>
-        <p:spPr>
-          <a:xfrm>
-            <a:off x="731520" y="6263640"/>
-            <a:ext cx="10698480" cy="320040"/>
+              <a:t>▸  Authorization request includes code_challenge; token request sends the original code_verifier</a:t>
+            </a:r>
+          </a:p>
+        </p:txBody>
+      </p:sp>
+      <p:sp>
+        <p:nvSpPr>
+          <p:cNvPr id="8" name="TextBox 7"/>
+          <p:cNvSpPr txBox="1"/>
+          <p:nvPr/>
+        </p:nvSpPr>
+        <p:spPr>
+          <a:xfrm>
+            <a:off x="502920" y="2944368"/>
+            <a:ext cx="11155680" cy="777240"/>
+          </a:xfrm>
+          <a:prstGeom prst="rect">
+            <a:avLst/>
+          </a:prstGeom>
+          <a:noFill/>
+        </p:spPr>
+        <p:txBody>
+          <a:bodyPr wrap="square">
+            <a:spAutoFit/>
+          </a:bodyPr>
+          <a:lstStyle/>
+          <a:p>
+            <a:pPr algn="l"/>
+            <a:r>
+              <a:rPr sz="1500" b="0">
+                <a:solidFill>
+                  <a:srgbClr val="FFFFFF"/>
+                </a:solidFill>
+              </a:rPr>
+              <a:t>▸  Authorization server rejects if BASE64URL(SHA256(verifier)) != stored code_challenge</a:t>
+            </a:r>
+          </a:p>
+        </p:txBody>
+      </p:sp>
+      <p:sp>
+        <p:nvSpPr>
+          <p:cNvPr id="9" name="TextBox 8"/>
+          <p:cNvSpPr txBox="1"/>
+          <p:nvPr/>
+        </p:nvSpPr>
+        <p:spPr>
+          <a:xfrm>
+            <a:off x="502920" y="3767328"/>
+            <a:ext cx="11155680" cy="777240"/>
+          </a:xfrm>
+          <a:prstGeom prst="rect">
+            <a:avLst/>
+          </a:prstGeom>
+          <a:noFill/>
+        </p:spPr>
+        <p:txBody>
+          <a:bodyPr wrap="square">
+            <a:spAutoFit/>
+          </a:bodyPr>
+          <a:lstStyle/>
+          <a:p>
+            <a:pPr algn="l"/>
+            <a:r>
+              <a:rPr sz="1500" b="0">
+                <a:solidFill>
+                  <a:srgbClr val="FFFFFF"/>
+                </a:solidFill>
+              </a:rPr>
+              <a:t>▸  Stolen authorization codes are useless without the code_verifier held only by the legitimate client</a:t>
+            </a:r>
+          </a:p>
+        </p:txBody>
+      </p:sp>
+      <p:sp>
+        <p:nvSpPr>
+          <p:cNvPr id="10" name="TextBox 9"/>
+          <p:cNvSpPr txBox="1"/>
+          <p:nvPr/>
+        </p:nvSpPr>
+        <p:spPr>
+          <a:xfrm>
+            <a:off x="502920" y="4590288"/>
+            <a:ext cx="11155680" cy="777240"/>
+          </a:xfrm>
+          <a:prstGeom prst="rect">
+            <a:avLst/>
+          </a:prstGeom>
+          <a:noFill/>
+        </p:spPr>
+        <p:txBody>
+          <a:bodyPr wrap="square">
+            <a:spAutoFit/>
+          </a:bodyPr>
+          <a:lstStyle/>
+          <a:p>
+            <a:pPr algn="l"/>
+            <a:r>
+              <a:rPr sz="1500" b="0">
+                <a:solidFill>
+                  <a:srgbClr val="FFFFFF"/>
+                </a:solidFill>
+              </a:rPr>
+              <a:t>▸  MCP clients omitting code_challenge must be rejected by OAuth 2.1-compliant authorization servers</a:t>
+            </a:r>
+          </a:p>
+        </p:txBody>
+      </p:sp>
+      <p:sp>
+        <p:nvSpPr>
+          <p:cNvPr id="11" name="TextBox 10"/>
+          <p:cNvSpPr txBox="1"/>
+          <p:nvPr/>
+        </p:nvSpPr>
+        <p:spPr>
+          <a:xfrm>
+            <a:off x="457200" y="6492240"/>
+            <a:ext cx="11247120" cy="320040"/>
           </a:xfrm>
           <a:prstGeom prst="rect">
             <a:avLst/>
@@ -5330,14 +6586,6 @@
 <file path=ppt/slides/slide6.xml><?xml version="1.0" encoding="utf-8"?>
 <p:sld xmlns:a="http://schemas.openxmlformats.org/drawingml/2006/main" xmlns:p="http://schemas.openxmlformats.org/presentationml/2006/main" xmlns:r="http://schemas.openxmlformats.org/officeDocument/2006/relationships">
   <p:cSld>
-    <p:bg>
-      <p:bgPr>
-        <a:solidFill>
-          <a:srgbClr val="18181B"/>
-        </a:solidFill>
-        <a:effectLst/>
-      </p:bgPr>
-    </p:bg>
     <p:spTree>
       <p:nvGrpSpPr>
         <p:cNvPr id="1" name=""/>
@@ -5347,35 +6595,44 @@
       <p:grpSpPr/>
       <p:sp>
         <p:nvSpPr>
-          <p:cNvPr id="2" name="TextBox 1"/>
-          <p:cNvSpPr txBox="1"/>
-          <p:nvPr/>
-        </p:nvSpPr>
-        <p:spPr>
-          <a:xfrm>
-            <a:off x="731520" y="411480"/>
-            <a:ext cx="10789920" cy="822960"/>
-          </a:xfrm>
-          <a:prstGeom prst="rect">
-            <a:avLst/>
-          </a:prstGeom>
-          <a:noFill/>
-        </p:spPr>
-        <p:txBody>
-          <a:bodyPr wrap="square">
-            <a:spAutoFit/>
-          </a:bodyPr>
-          <a:lstStyle/>
-          <a:p>
-            <a:pPr algn="l"/>
-            <a:r>
-              <a:rPr sz="2600" b="1">
-                <a:solidFill>
-                  <a:srgbClr val="FFFFFF"/>
-                </a:solidFill>
-              </a:rPr>
-              <a:t>OAuth 2.1: what changed and why it matters</a:t>
-            </a:r>
+          <p:cNvPr id="2" name="Rectangle 1"/>
+          <p:cNvSpPr/>
+          <p:nvPr/>
+        </p:nvSpPr>
+        <p:spPr>
+          <a:xfrm>
+            <a:off x="0" y="0"/>
+            <a:ext cx="12191695" cy="6858000"/>
+          </a:xfrm>
+          <a:prstGeom prst="rect">
+            <a:avLst/>
+          </a:prstGeom>
+          <a:solidFill>
+            <a:srgbClr val="18181B"/>
+          </a:solidFill>
+          <a:ln>
+            <a:noFill/>
+          </a:ln>
+        </p:spPr>
+        <p:style>
+          <a:lnRef idx="1">
+            <a:schemeClr val="accent1"/>
+          </a:lnRef>
+          <a:fillRef idx="3">
+            <a:schemeClr val="accent1"/>
+          </a:fillRef>
+          <a:effectRef idx="2">
+            <a:schemeClr val="accent1"/>
+          </a:effectRef>
+          <a:fontRef idx="minor">
+            <a:schemeClr val="lt1"/>
+          </a:fontRef>
+        </p:style>
+        <p:txBody>
+          <a:bodyPr rtlCol="0" anchor="ctr"/>
+          <a:lstStyle/>
+          <a:p>
+            <a:pPr algn="ctr"/>
           </a:p>
         </p:txBody>
       </p:sp>
@@ -5387,8 +6644,85 @@
         </p:nvSpPr>
         <p:spPr>
           <a:xfrm>
-            <a:off x="731520" y="1325880"/>
-            <a:ext cx="10789920" cy="27432"/>
+            <a:off x="0" y="0"/>
+            <a:ext cx="12191695" cy="54864"/>
+          </a:xfrm>
+          <a:prstGeom prst="rect">
+            <a:avLst/>
+          </a:prstGeom>
+          <a:solidFill>
+            <a:srgbClr val="6366F1"/>
+          </a:solidFill>
+          <a:ln>
+            <a:noFill/>
+          </a:ln>
+        </p:spPr>
+        <p:style>
+          <a:lnRef idx="1">
+            <a:schemeClr val="accent1"/>
+          </a:lnRef>
+          <a:fillRef idx="3">
+            <a:schemeClr val="accent1"/>
+          </a:fillRef>
+          <a:effectRef idx="2">
+            <a:schemeClr val="accent1"/>
+          </a:effectRef>
+          <a:fontRef idx="minor">
+            <a:schemeClr val="lt1"/>
+          </a:fontRef>
+        </p:style>
+        <p:txBody>
+          <a:bodyPr rtlCol="0" anchor="ctr"/>
+          <a:lstStyle/>
+          <a:p>
+            <a:pPr algn="ctr"/>
+          </a:p>
+        </p:txBody>
+      </p:sp>
+      <p:sp>
+        <p:nvSpPr>
+          <p:cNvPr id="4" name="TextBox 3"/>
+          <p:cNvSpPr txBox="1"/>
+          <p:nvPr/>
+        </p:nvSpPr>
+        <p:spPr>
+          <a:xfrm>
+            <a:off x="457200" y="164592"/>
+            <a:ext cx="11247120" cy="868680"/>
+          </a:xfrm>
+          <a:prstGeom prst="rect">
+            <a:avLst/>
+          </a:prstGeom>
+          <a:noFill/>
+        </p:spPr>
+        <p:txBody>
+          <a:bodyPr wrap="square">
+            <a:spAutoFit/>
+          </a:bodyPr>
+          <a:lstStyle/>
+          <a:p>
+            <a:pPr algn="l"/>
+            <a:r>
+              <a:rPr sz="2800" b="1">
+                <a:solidFill>
+                  <a:srgbClr val="FFFFFF"/>
+                </a:solidFill>
+              </a:rPr>
+              <a:t>Bearer Tokens — Why They Fail in MCP</a:t>
+            </a:r>
+          </a:p>
+        </p:txBody>
+      </p:sp>
+      <p:sp>
+        <p:nvSpPr>
+          <p:cNvPr id="5" name="Rectangle 4"/>
+          <p:cNvSpPr/>
+          <p:nvPr/>
+        </p:nvSpPr>
+        <p:spPr>
+          <a:xfrm>
+            <a:off x="457200" y="1143000"/>
+            <a:ext cx="11247120" cy="27432"/>
           </a:xfrm>
           <a:prstGeom prst="rect">
             <a:avLst/>
@@ -5424,14 +6758,14 @@
       </p:sp>
       <p:sp>
         <p:nvSpPr>
-          <p:cNvPr id="4" name="TextBox 3"/>
-          <p:cNvSpPr txBox="1"/>
-          <p:nvPr/>
-        </p:nvSpPr>
-        <p:spPr>
-          <a:xfrm>
-            <a:off x="868680" y="1600200"/>
-            <a:ext cx="10515600" cy="1005840"/>
+          <p:cNvPr id="6" name="TextBox 5"/>
+          <p:cNvSpPr txBox="1"/>
+          <p:nvPr/>
+        </p:nvSpPr>
+        <p:spPr>
+          <a:xfrm>
+            <a:off x="502920" y="1298448"/>
+            <a:ext cx="11155680" cy="777240"/>
           </a:xfrm>
           <a:prstGeom prst="rect">
             <a:avLst/>
@@ -5446,26 +6780,26 @@
           <a:p>
             <a:pPr algn="l"/>
             <a:r>
-              <a:rPr sz="1800" b="0">
+              <a:rPr sz="1500" b="0">
                 <a:solidFill>
                   <a:srgbClr val="FFFFFF"/>
                 </a:solidFill>
               </a:rPr>
-              <a:t>• OAuth 2.0 (2012) was designed for a world of server-rendered web apps and mobile apps with long-lived refresh tokens.</a:t>
-            </a:r>
-          </a:p>
-        </p:txBody>
-      </p:sp>
-      <p:sp>
-        <p:nvSpPr>
-          <p:cNvPr id="5" name="TextBox 4"/>
-          <p:cNvSpPr txBox="1"/>
-          <p:nvPr/>
-        </p:nvSpPr>
-        <p:spPr>
-          <a:xfrm>
-            <a:off x="868680" y="2697480"/>
-            <a:ext cx="10515600" cy="1005840"/>
+              <a:t>▸  Bearer means whoever holds the token wins — no binding to the client that requested it</a:t>
+            </a:r>
+          </a:p>
+        </p:txBody>
+      </p:sp>
+      <p:sp>
+        <p:nvSpPr>
+          <p:cNvPr id="7" name="TextBox 6"/>
+          <p:cNvSpPr txBox="1"/>
+          <p:nvPr/>
+        </p:nvSpPr>
+        <p:spPr>
+          <a:xfrm>
+            <a:off x="502920" y="2121408"/>
+            <a:ext cx="11155680" cy="777240"/>
           </a:xfrm>
           <a:prstGeom prst="rect">
             <a:avLst/>
@@ -5480,26 +6814,26 @@
           <a:p>
             <a:pPr algn="l"/>
             <a:r>
-              <a:rPr sz="1800" b="0">
+              <a:rPr sz="1500" b="0">
                 <a:solidFill>
                   <a:srgbClr val="FFFFFF"/>
                 </a:solidFill>
               </a:rPr>
-              <a:t>• The changes that directly affect MCP server implementations:</a:t>
-            </a:r>
-          </a:p>
-        </p:txBody>
-      </p:sp>
-      <p:sp>
-        <p:nvSpPr>
-          <p:cNvPr id="6" name="TextBox 5"/>
-          <p:cNvSpPr txBox="1"/>
-          <p:nvPr/>
-        </p:nvSpPr>
-        <p:spPr>
-          <a:xfrm>
-            <a:off x="868680" y="3794760"/>
-            <a:ext cx="10515600" cy="1005840"/>
+              <a:t>▸  Prompt injection extracts tokens at the application layer, bypassing TLS and VPN controls</a:t>
+            </a:r>
+          </a:p>
+        </p:txBody>
+      </p:sp>
+      <p:sp>
+        <p:nvSpPr>
+          <p:cNvPr id="8" name="TextBox 7"/>
+          <p:cNvSpPr txBox="1"/>
+          <p:nvPr/>
+        </p:nvSpPr>
+        <p:spPr>
+          <a:xfrm>
+            <a:off x="502920" y="2944368"/>
+            <a:ext cx="11155680" cy="777240"/>
           </a:xfrm>
           <a:prstGeom prst="rect">
             <a:avLst/>
@@ -5514,26 +6848,26 @@
           <a:p>
             <a:pPr algn="l"/>
             <a:r>
-              <a:rPr sz="1800" b="0">
+              <a:rPr sz="1500" b="0">
                 <a:solidFill>
                   <a:srgbClr val="FFFFFF"/>
                 </a:solidFill>
               </a:rPr>
-              <a:t>• PKCE is now mandatory for all grant types</a:t>
-            </a:r>
-          </a:p>
-        </p:txBody>
-      </p:sp>
-      <p:sp>
-        <p:nvSpPr>
-          <p:cNvPr id="7" name="TextBox 6"/>
-          <p:cNvSpPr txBox="1"/>
-          <p:nvPr/>
-        </p:nvSpPr>
-        <p:spPr>
-          <a:xfrm>
-            <a:off x="868680" y="4892040"/>
-            <a:ext cx="10515600" cy="1005840"/>
+              <a:t>▸  Structured logging pipelines frequently capture Authorization headers unintentionally</a:t>
+            </a:r>
+          </a:p>
+        </p:txBody>
+      </p:sp>
+      <p:sp>
+        <p:nvSpPr>
+          <p:cNvPr id="9" name="TextBox 8"/>
+          <p:cNvSpPr txBox="1"/>
+          <p:nvPr/>
+        </p:nvSpPr>
+        <p:spPr>
+          <a:xfrm>
+            <a:off x="502920" y="3767328"/>
+            <a:ext cx="11155680" cy="777240"/>
           </a:xfrm>
           <a:prstGeom prst="rect">
             <a:avLst/>
@@ -5548,26 +6882,60 @@
           <a:p>
             <a:pPr algn="l"/>
             <a:r>
-              <a:rPr sz="1800" b="0">
+              <a:rPr sz="1500" b="0">
                 <a:solidFill>
                   <a:srgbClr val="FFFFFF"/>
                 </a:solidFill>
               </a:rPr>
-              <a:t>• PKCE (Proof Key for Code Exchange, RFC 7636) was originally an optional extension for mobile apps to prevent authorization code interception attacks.</a:t>
-            </a:r>
-          </a:p>
-        </p:txBody>
-      </p:sp>
-      <p:sp>
-        <p:nvSpPr>
-          <p:cNvPr id="8" name="TextBox 7"/>
-          <p:cNvSpPr txBox="1"/>
-          <p:nvPr/>
-        </p:nvSpPr>
-        <p:spPr>
-          <a:xfrm>
-            <a:off x="731520" y="6263640"/>
-            <a:ext cx="10698480" cy="320040"/>
+              <a:t>▸  Multi-tenant servers may accept tokens issued for a different tenant if binding is absent</a:t>
+            </a:r>
+          </a:p>
+        </p:txBody>
+      </p:sp>
+      <p:sp>
+        <p:nvSpPr>
+          <p:cNvPr id="10" name="TextBox 9"/>
+          <p:cNvSpPr txBox="1"/>
+          <p:nvPr/>
+        </p:nvSpPr>
+        <p:spPr>
+          <a:xfrm>
+            <a:off x="502920" y="4590288"/>
+            <a:ext cx="11155680" cy="777240"/>
+          </a:xfrm>
+          <a:prstGeom prst="rect">
+            <a:avLst/>
+          </a:prstGeom>
+          <a:noFill/>
+        </p:spPr>
+        <p:txBody>
+          <a:bodyPr wrap="square">
+            <a:spAutoFit/>
+          </a:bodyPr>
+          <a:lstStyle/>
+          <a:p>
+            <a:pPr algn="l"/>
+            <a:r>
+              <a:rPr sz="1500" b="0">
+                <a:solidFill>
+                  <a:srgbClr val="FFFFFF"/>
+                </a:solidFill>
+              </a:rPr>
+              <a:t>▸  30-minute agentic sessions hold high-value Bearer tokens far longer than browser sessions</a:t>
+            </a:r>
+          </a:p>
+        </p:txBody>
+      </p:sp>
+      <p:sp>
+        <p:nvSpPr>
+          <p:cNvPr id="11" name="TextBox 10"/>
+          <p:cNvSpPr txBox="1"/>
+          <p:nvPr/>
+        </p:nvSpPr>
+        <p:spPr>
+          <a:xfrm>
+            <a:off x="457200" y="6492240"/>
+            <a:ext cx="11247120" cy="320040"/>
           </a:xfrm>
           <a:prstGeom prst="rect">
             <a:avLst/>
@@ -5603,14 +6971,6 @@
 <file path=ppt/slides/slide7.xml><?xml version="1.0" encoding="utf-8"?>
 <p:sld xmlns:a="http://schemas.openxmlformats.org/drawingml/2006/main" xmlns:p="http://schemas.openxmlformats.org/presentationml/2006/main" xmlns:r="http://schemas.openxmlformats.org/officeDocument/2006/relationships">
   <p:cSld>
-    <p:bg>
-      <p:bgPr>
-        <a:solidFill>
-          <a:srgbClr val="18181B"/>
-        </a:solidFill>
-        <a:effectLst/>
-      </p:bgPr>
-    </p:bg>
     <p:spTree>
       <p:nvGrpSpPr>
         <p:cNvPr id="1" name=""/>
@@ -5620,35 +6980,44 @@
       <p:grpSpPr/>
       <p:sp>
         <p:nvSpPr>
-          <p:cNvPr id="2" name="TextBox 1"/>
-          <p:cNvSpPr txBox="1"/>
-          <p:nvPr/>
-        </p:nvSpPr>
-        <p:spPr>
-          <a:xfrm>
-            <a:off x="731520" y="411480"/>
-            <a:ext cx="10789920" cy="822960"/>
-          </a:xfrm>
-          <a:prstGeom prst="rect">
-            <a:avLst/>
-          </a:prstGeom>
-          <a:noFill/>
-        </p:spPr>
-        <p:txBody>
-          <a:bodyPr wrap="square">
-            <a:spAutoFit/>
-          </a:bodyPr>
-          <a:lstStyle/>
-          <a:p>
-            <a:pPr algn="l"/>
-            <a:r>
-              <a:rPr sz="2600" b="1">
-                <a:solidFill>
-                  <a:srgbClr val="FFFFFF"/>
-                </a:solidFill>
-              </a:rPr>
-              <a:t>OAuth 2.1: what changed and why it matters (2)</a:t>
-            </a:r>
+          <p:cNvPr id="2" name="Rectangle 1"/>
+          <p:cNvSpPr/>
+          <p:nvPr/>
+        </p:nvSpPr>
+        <p:spPr>
+          <a:xfrm>
+            <a:off x="0" y="0"/>
+            <a:ext cx="12191695" cy="6858000"/>
+          </a:xfrm>
+          <a:prstGeom prst="rect">
+            <a:avLst/>
+          </a:prstGeom>
+          <a:solidFill>
+            <a:srgbClr val="18181B"/>
+          </a:solidFill>
+          <a:ln>
+            <a:noFill/>
+          </a:ln>
+        </p:spPr>
+        <p:style>
+          <a:lnRef idx="1">
+            <a:schemeClr val="accent1"/>
+          </a:lnRef>
+          <a:fillRef idx="3">
+            <a:schemeClr val="accent1"/>
+          </a:fillRef>
+          <a:effectRef idx="2">
+            <a:schemeClr val="accent1"/>
+          </a:effectRef>
+          <a:fontRef idx="minor">
+            <a:schemeClr val="lt1"/>
+          </a:fontRef>
+        </p:style>
+        <p:txBody>
+          <a:bodyPr rtlCol="0" anchor="ctr"/>
+          <a:lstStyle/>
+          <a:p>
+            <a:pPr algn="ctr"/>
           </a:p>
         </p:txBody>
       </p:sp>
@@ -5660,8 +7029,85 @@
         </p:nvSpPr>
         <p:spPr>
           <a:xfrm>
-            <a:off x="731520" y="1325880"/>
-            <a:ext cx="10789920" cy="27432"/>
+            <a:off x="0" y="0"/>
+            <a:ext cx="12191695" cy="54864"/>
+          </a:xfrm>
+          <a:prstGeom prst="rect">
+            <a:avLst/>
+          </a:prstGeom>
+          <a:solidFill>
+            <a:srgbClr val="6366F1"/>
+          </a:solidFill>
+          <a:ln>
+            <a:noFill/>
+          </a:ln>
+        </p:spPr>
+        <p:style>
+          <a:lnRef idx="1">
+            <a:schemeClr val="accent1"/>
+          </a:lnRef>
+          <a:fillRef idx="3">
+            <a:schemeClr val="accent1"/>
+          </a:fillRef>
+          <a:effectRef idx="2">
+            <a:schemeClr val="accent1"/>
+          </a:effectRef>
+          <a:fontRef idx="minor">
+            <a:schemeClr val="lt1"/>
+          </a:fontRef>
+        </p:style>
+        <p:txBody>
+          <a:bodyPr rtlCol="0" anchor="ctr"/>
+          <a:lstStyle/>
+          <a:p>
+            <a:pPr algn="ctr"/>
+          </a:p>
+        </p:txBody>
+      </p:sp>
+      <p:sp>
+        <p:nvSpPr>
+          <p:cNvPr id="4" name="TextBox 3"/>
+          <p:cNvSpPr txBox="1"/>
+          <p:nvPr/>
+        </p:nvSpPr>
+        <p:spPr>
+          <a:xfrm>
+            <a:off x="457200" y="164592"/>
+            <a:ext cx="11247120" cy="868680"/>
+          </a:xfrm>
+          <a:prstGeom prst="rect">
+            <a:avLst/>
+          </a:prstGeom>
+          <a:noFill/>
+        </p:spPr>
+        <p:txBody>
+          <a:bodyPr wrap="square">
+            <a:spAutoFit/>
+          </a:bodyPr>
+          <a:lstStyle/>
+          <a:p>
+            <a:pPr algn="l"/>
+            <a:r>
+              <a:rPr sz="2800" b="1">
+                <a:solidFill>
+                  <a:srgbClr val="FFFFFF"/>
+                </a:solidFill>
+              </a:rPr>
+              <a:t>DPoP — Cryptographic Token Binding (RFC 9449)</a:t>
+            </a:r>
+          </a:p>
+        </p:txBody>
+      </p:sp>
+      <p:sp>
+        <p:nvSpPr>
+          <p:cNvPr id="5" name="Rectangle 4"/>
+          <p:cNvSpPr/>
+          <p:nvPr/>
+        </p:nvSpPr>
+        <p:spPr>
+          <a:xfrm>
+            <a:off x="457200" y="1143000"/>
+            <a:ext cx="11247120" cy="27432"/>
           </a:xfrm>
           <a:prstGeom prst="rect">
             <a:avLst/>
@@ -5697,14 +7143,14 @@
       </p:sp>
       <p:sp>
         <p:nvSpPr>
-          <p:cNvPr id="4" name="TextBox 3"/>
-          <p:cNvSpPr txBox="1"/>
-          <p:nvPr/>
-        </p:nvSpPr>
-        <p:spPr>
-          <a:xfrm>
-            <a:off x="868680" y="1600200"/>
-            <a:ext cx="10515600" cy="1005840"/>
+          <p:cNvPr id="6" name="TextBox 5"/>
+          <p:cNvSpPr txBox="1"/>
+          <p:nvPr/>
+        </p:nvSpPr>
+        <p:spPr>
+          <a:xfrm>
+            <a:off x="502920" y="1298448"/>
+            <a:ext cx="11155680" cy="777240"/>
           </a:xfrm>
           <a:prstGeom prst="rect">
             <a:avLst/>
@@ -5719,26 +7165,26 @@
           <a:p>
             <a:pPr algn="l"/>
             <a:r>
-              <a:rPr sz="1800" b="0">
+              <a:rPr sz="1500" b="0">
                 <a:solidFill>
                   <a:srgbClr val="FFFFFF"/>
                 </a:solidFill>
               </a:rPr>
-              <a:t>• In practice: when an MCP client initiates an OAuth flow to get tokens for your server, it must include a code_challenge in the authorization request and a code_</a:t>
-            </a:r>
-          </a:p>
-        </p:txBody>
-      </p:sp>
-      <p:sp>
-        <p:nvSpPr>
-          <p:cNvPr id="5" name="TextBox 4"/>
-          <p:cNvSpPr txBox="1"/>
-          <p:nvPr/>
-        </p:nvSpPr>
-        <p:spPr>
-          <a:xfrm>
-            <a:off x="868680" y="2697480"/>
-            <a:ext cx="10515600" cy="1005840"/>
+              <a:t>▸  Client generates an ephemeral EC/RSA key pair; private key never leaves the client</a:t>
+            </a:r>
+          </a:p>
+        </p:txBody>
+      </p:sp>
+      <p:sp>
+        <p:nvSpPr>
+          <p:cNvPr id="7" name="TextBox 6"/>
+          <p:cNvSpPr txBox="1"/>
+          <p:nvPr/>
+        </p:nvSpPr>
+        <p:spPr>
+          <a:xfrm>
+            <a:off x="502920" y="2121408"/>
+            <a:ext cx="11155680" cy="777240"/>
           </a:xfrm>
           <a:prstGeom prst="rect">
             <a:avLst/>
@@ -5753,26 +7199,26 @@
           <a:p>
             <a:pPr algn="l"/>
             <a:r>
-              <a:rPr sz="1800" b="0">
+              <a:rPr sz="1500" b="0">
                 <a:solidFill>
                   <a:srgbClr val="FFFFFF"/>
                 </a:solidFill>
               </a:rPr>
-              <a:t>• Implicit grant removed</a:t>
-            </a:r>
-          </a:p>
-        </p:txBody>
-      </p:sp>
-      <p:sp>
-        <p:nvSpPr>
-          <p:cNvPr id="6" name="TextBox 5"/>
-          <p:cNvSpPr txBox="1"/>
-          <p:nvPr/>
-        </p:nvSpPr>
-        <p:spPr>
-          <a:xfrm>
-            <a:off x="868680" y="3794760"/>
-            <a:ext cx="10515600" cy="1005840"/>
+              <a:t>▸  Every token request and API call includes a DPoP proof JWT signed by the private key</a:t>
+            </a:r>
+          </a:p>
+        </p:txBody>
+      </p:sp>
+      <p:sp>
+        <p:nvSpPr>
+          <p:cNvPr id="8" name="TextBox 7"/>
+          <p:cNvSpPr txBox="1"/>
+          <p:nvPr/>
+        </p:nvSpPr>
+        <p:spPr>
+          <a:xfrm>
+            <a:off x="502920" y="2944368"/>
+            <a:ext cx="11155680" cy="777240"/>
           </a:xfrm>
           <a:prstGeom prst="rect">
             <a:avLst/>
@@ -5787,26 +7233,26 @@
           <a:p>
             <a:pPr algn="l"/>
             <a:r>
-              <a:rPr sz="1800" b="0">
+              <a:rPr sz="1500" b="0">
                 <a:solidFill>
                   <a:srgbClr val="FFFFFF"/>
                 </a:solidFill>
               </a:rPr>
-              <a:t>• The OAuth 2.0 implicit grant returned access tokens directly in the URL fragment after authorization.</a:t>
-            </a:r>
-          </a:p>
-        </p:txBody>
-      </p:sp>
-      <p:sp>
-        <p:nvSpPr>
-          <p:cNvPr id="7" name="TextBox 6"/>
-          <p:cNvSpPr txBox="1"/>
-          <p:nvPr/>
-        </p:nvSpPr>
-        <p:spPr>
-          <a:xfrm>
-            <a:off x="868680" y="4892040"/>
-            <a:ext cx="10515600" cy="1005840"/>
+              <a:t>▸  The access token's cnf.jkt claim contains a JWK thumbprint of the client's public key</a:t>
+            </a:r>
+          </a:p>
+        </p:txBody>
+      </p:sp>
+      <p:sp>
+        <p:nvSpPr>
+          <p:cNvPr id="9" name="TextBox 8"/>
+          <p:cNvSpPr txBox="1"/>
+          <p:nvPr/>
+        </p:nvSpPr>
+        <p:spPr>
+          <a:xfrm>
+            <a:off x="502920" y="3767328"/>
+            <a:ext cx="11155680" cy="777240"/>
           </a:xfrm>
           <a:prstGeom prst="rect">
             <a:avLst/>
@@ -5821,26 +7267,60 @@
           <a:p>
             <a:pPr algn="l"/>
             <a:r>
-              <a:rPr sz="1800" b="0">
+              <a:rPr sz="1500" b="0">
                 <a:solidFill>
                   <a:srgbClr val="FFFFFF"/>
                 </a:solidFill>
               </a:rPr>
-              <a:t>• Token lifetime requirements</a:t>
-            </a:r>
-          </a:p>
-        </p:txBody>
-      </p:sp>
-      <p:sp>
-        <p:nvSpPr>
-          <p:cNvPr id="8" name="TextBox 7"/>
-          <p:cNvSpPr txBox="1"/>
-          <p:nvPr/>
-        </p:nvSpPr>
-        <p:spPr>
-          <a:xfrm>
-            <a:off x="731520" y="6263640"/>
-            <a:ext cx="10698480" cy="320040"/>
+              <a:t>▸  Stolen token is useless — using it requires a valid DPoP proof from the matching private key</a:t>
+            </a:r>
+          </a:p>
+        </p:txBody>
+      </p:sp>
+      <p:sp>
+        <p:nvSpPr>
+          <p:cNvPr id="10" name="TextBox 9"/>
+          <p:cNvSpPr txBox="1"/>
+          <p:nvPr/>
+        </p:nvSpPr>
+        <p:spPr>
+          <a:xfrm>
+            <a:off x="502920" y="4590288"/>
+            <a:ext cx="11155680" cy="777240"/>
+          </a:xfrm>
+          <a:prstGeom prst="rect">
+            <a:avLst/>
+          </a:prstGeom>
+          <a:noFill/>
+        </p:spPr>
+        <p:txBody>
+          <a:bodyPr wrap="square">
+            <a:spAutoFit/>
+          </a:bodyPr>
+          <a:lstStyle/>
+          <a:p>
+            <a:pPr algn="l"/>
+            <a:r>
+              <a:rPr sz="1500" b="0">
+                <a:solidFill>
+                  <a:srgbClr val="FFFFFF"/>
+                </a:solidFill>
+              </a:rPr>
+              <a:t>▸  DPoP proof includes htm (method), htu (URL), iat (freshness), and jti (replay prevention)</a:t>
+            </a:r>
+          </a:p>
+        </p:txBody>
+      </p:sp>
+      <p:sp>
+        <p:nvSpPr>
+          <p:cNvPr id="11" name="TextBox 10"/>
+          <p:cNvSpPr txBox="1"/>
+          <p:nvPr/>
+        </p:nvSpPr>
+        <p:spPr>
+          <a:xfrm>
+            <a:off x="457200" y="6492240"/>
+            <a:ext cx="11247120" cy="320040"/>
           </a:xfrm>
           <a:prstGeom prst="rect">
             <a:avLst/>
@@ -5876,14 +7356,6 @@
 <file path=ppt/slides/slide8.xml><?xml version="1.0" encoding="utf-8"?>
 <p:sld xmlns:a="http://schemas.openxmlformats.org/drawingml/2006/main" xmlns:p="http://schemas.openxmlformats.org/presentationml/2006/main" xmlns:r="http://schemas.openxmlformats.org/officeDocument/2006/relationships">
   <p:cSld>
-    <p:bg>
-      <p:bgPr>
-        <a:solidFill>
-          <a:srgbClr val="18181B"/>
-        </a:solidFill>
-        <a:effectLst/>
-      </p:bgPr>
-    </p:bg>
     <p:spTree>
       <p:nvGrpSpPr>
         <p:cNvPr id="1" name=""/>
@@ -5893,35 +7365,44 @@
       <p:grpSpPr/>
       <p:sp>
         <p:nvSpPr>
-          <p:cNvPr id="2" name="TextBox 1"/>
-          <p:cNvSpPr txBox="1"/>
-          <p:nvPr/>
-        </p:nvSpPr>
-        <p:spPr>
-          <a:xfrm>
-            <a:off x="731520" y="411480"/>
-            <a:ext cx="10789920" cy="822960"/>
-          </a:xfrm>
-          <a:prstGeom prst="rect">
-            <a:avLst/>
-          </a:prstGeom>
-          <a:noFill/>
-        </p:spPr>
-        <p:txBody>
-          <a:bodyPr wrap="square">
-            <a:spAutoFit/>
-          </a:bodyPr>
-          <a:lstStyle/>
-          <a:p>
-            <a:pPr algn="l"/>
-            <a:r>
-              <a:rPr sz="2600" b="1">
-                <a:solidFill>
-                  <a:srgbClr val="FFFFFF"/>
-                </a:solidFill>
-              </a:rPr>
-              <a:t>OAuth 2.1: what changed and why it matters (3)</a:t>
-            </a:r>
+          <p:cNvPr id="2" name="Rectangle 1"/>
+          <p:cNvSpPr/>
+          <p:nvPr/>
+        </p:nvSpPr>
+        <p:spPr>
+          <a:xfrm>
+            <a:off x="0" y="0"/>
+            <a:ext cx="12191695" cy="6858000"/>
+          </a:xfrm>
+          <a:prstGeom prst="rect">
+            <a:avLst/>
+          </a:prstGeom>
+          <a:solidFill>
+            <a:srgbClr val="18181B"/>
+          </a:solidFill>
+          <a:ln>
+            <a:noFill/>
+          </a:ln>
+        </p:spPr>
+        <p:style>
+          <a:lnRef idx="1">
+            <a:schemeClr val="accent1"/>
+          </a:lnRef>
+          <a:fillRef idx="3">
+            <a:schemeClr val="accent1"/>
+          </a:fillRef>
+          <a:effectRef idx="2">
+            <a:schemeClr val="accent1"/>
+          </a:effectRef>
+          <a:fontRef idx="minor">
+            <a:schemeClr val="lt1"/>
+          </a:fontRef>
+        </p:style>
+        <p:txBody>
+          <a:bodyPr rtlCol="0" anchor="ctr"/>
+          <a:lstStyle/>
+          <a:p>
+            <a:pPr algn="ctr"/>
           </a:p>
         </p:txBody>
       </p:sp>
@@ -5933,8 +7414,85 @@
         </p:nvSpPr>
         <p:spPr>
           <a:xfrm>
-            <a:off x="731520" y="1325880"/>
-            <a:ext cx="10789920" cy="27432"/>
+            <a:off x="0" y="0"/>
+            <a:ext cx="12191695" cy="54864"/>
+          </a:xfrm>
+          <a:prstGeom prst="rect">
+            <a:avLst/>
+          </a:prstGeom>
+          <a:solidFill>
+            <a:srgbClr val="6366F1"/>
+          </a:solidFill>
+          <a:ln>
+            <a:noFill/>
+          </a:ln>
+        </p:spPr>
+        <p:style>
+          <a:lnRef idx="1">
+            <a:schemeClr val="accent1"/>
+          </a:lnRef>
+          <a:fillRef idx="3">
+            <a:schemeClr val="accent1"/>
+          </a:fillRef>
+          <a:effectRef idx="2">
+            <a:schemeClr val="accent1"/>
+          </a:effectRef>
+          <a:fontRef idx="minor">
+            <a:schemeClr val="lt1"/>
+          </a:fontRef>
+        </p:style>
+        <p:txBody>
+          <a:bodyPr rtlCol="0" anchor="ctr"/>
+          <a:lstStyle/>
+          <a:p>
+            <a:pPr algn="ctr"/>
+          </a:p>
+        </p:txBody>
+      </p:sp>
+      <p:sp>
+        <p:nvSpPr>
+          <p:cNvPr id="4" name="TextBox 3"/>
+          <p:cNvSpPr txBox="1"/>
+          <p:nvPr/>
+        </p:nvSpPr>
+        <p:spPr>
+          <a:xfrm>
+            <a:off x="457200" y="164592"/>
+            <a:ext cx="11247120" cy="868680"/>
+          </a:xfrm>
+          <a:prstGeom prst="rect">
+            <a:avLst/>
+          </a:prstGeom>
+          <a:noFill/>
+        </p:spPr>
+        <p:txBody>
+          <a:bodyPr wrap="square">
+            <a:spAutoFit/>
+          </a:bodyPr>
+          <a:lstStyle/>
+          <a:p>
+            <a:pPr algn="l"/>
+            <a:r>
+              <a:rPr sz="2800" b="1">
+                <a:solidFill>
+                  <a:srgbClr val="FFFFFF"/>
+                </a:solidFill>
+              </a:rPr>
+              <a:t>DPoP — Six Validation Steps on Every Request</a:t>
+            </a:r>
+          </a:p>
+        </p:txBody>
+      </p:sp>
+      <p:sp>
+        <p:nvSpPr>
+          <p:cNvPr id="5" name="Rectangle 4"/>
+          <p:cNvSpPr/>
+          <p:nvPr/>
+        </p:nvSpPr>
+        <p:spPr>
+          <a:xfrm>
+            <a:off x="457200" y="1143000"/>
+            <a:ext cx="11247120" cy="27432"/>
           </a:xfrm>
           <a:prstGeom prst="rect">
             <a:avLst/>
@@ -5970,14 +7528,14 @@
       </p:sp>
       <p:sp>
         <p:nvSpPr>
-          <p:cNvPr id="4" name="TextBox 3"/>
-          <p:cNvSpPr txBox="1"/>
-          <p:nvPr/>
-        </p:nvSpPr>
-        <p:spPr>
-          <a:xfrm>
-            <a:off x="868680" y="1600200"/>
-            <a:ext cx="10515600" cy="1005840"/>
+          <p:cNvPr id="6" name="TextBox 5"/>
+          <p:cNvSpPr txBox="1"/>
+          <p:nvPr/>
+        </p:nvSpPr>
+        <p:spPr>
+          <a:xfrm>
+            <a:off x="502920" y="1298448"/>
+            <a:ext cx="11155680" cy="777240"/>
           </a:xfrm>
           <a:prstGeom prst="rect">
             <a:avLst/>
@@ -5992,26 +7550,26 @@
           <a:p>
             <a:pPr algn="l"/>
             <a:r>
-              <a:rPr sz="1800" b="0">
+              <a:rPr sz="1500" b="0">
                 <a:solidFill>
                   <a:srgbClr val="FFFFFF"/>
                 </a:solidFill>
               </a:rPr>
-              <a:t>• OAuth 2.1 tightens guidance on refresh token rotation (one-time use) and recommends short-lived access tokens (minutes, not hours).</a:t>
-            </a:r>
-          </a:p>
-        </p:txBody>
-      </p:sp>
-      <p:sp>
-        <p:nvSpPr>
-          <p:cNvPr id="5" name="TextBox 4"/>
-          <p:cNvSpPr txBox="1"/>
-          <p:nvPr/>
-        </p:nvSpPr>
-        <p:spPr>
-          <a:xfrm>
-            <a:off x="868680" y="2697480"/>
-            <a:ext cx="10515600" cy="1005840"/>
+              <a:t>▸  1. Verify the Authorization: DPoP &lt;token&gt; is a valid, unexpired access token</a:t>
+            </a:r>
+          </a:p>
+        </p:txBody>
+      </p:sp>
+      <p:sp>
+        <p:nvSpPr>
+          <p:cNvPr id="7" name="TextBox 6"/>
+          <p:cNvSpPr txBox="1"/>
+          <p:nvPr/>
+        </p:nvSpPr>
+        <p:spPr>
+          <a:xfrm>
+            <a:off x="502920" y="2121408"/>
+            <a:ext cx="11155680" cy="777240"/>
           </a:xfrm>
           <a:prstGeom prst="rect">
             <a:avLst/>
@@ -6026,26 +7584,26 @@
           <a:p>
             <a:pPr algn="l"/>
             <a:r>
-              <a:rPr sz="1800" b="0">
+              <a:rPr sz="1500" b="0">
                 <a:solidFill>
                   <a:srgbClr val="FFFFFF"/>
                 </a:solidFill>
               </a:rPr>
-              <a:t>• The implicit grant removal breaks a common pattern.</a:t>
-            </a:r>
-          </a:p>
-        </p:txBody>
-      </p:sp>
-      <p:sp>
-        <p:nvSpPr>
-          <p:cNvPr id="6" name="TextBox 5"/>
-          <p:cNvSpPr txBox="1"/>
-          <p:nvPr/>
-        </p:nvSpPr>
-        <p:spPr>
-          <a:xfrm>
-            <a:off x="868680" y="3794760"/>
-            <a:ext cx="10515600" cy="1005840"/>
+              <a:t>▸  2. Verify the DPoP proof JWT signature using the public key in the proof header</a:t>
+            </a:r>
+          </a:p>
+        </p:txBody>
+      </p:sp>
+      <p:sp>
+        <p:nvSpPr>
+          <p:cNvPr id="8" name="TextBox 7"/>
+          <p:cNvSpPr txBox="1"/>
+          <p:nvPr/>
+        </p:nvSpPr>
+        <p:spPr>
+          <a:xfrm>
+            <a:off x="502920" y="2944368"/>
+            <a:ext cx="11155680" cy="777240"/>
           </a:xfrm>
           <a:prstGeom prst="rect">
             <a:avLst/>
@@ -6060,26 +7618,26 @@
           <a:p>
             <a:pPr algn="l"/>
             <a:r>
-              <a:rPr sz="1800" b="0">
+              <a:rPr sz="1500" b="0">
                 <a:solidFill>
                   <a:srgbClr val="FFFFFF"/>
                 </a:solidFill>
               </a:rPr>
-              <a:t>• system="You are an OAuth 2.1 implementation expert.</a:t>
-            </a:r>
-          </a:p>
-        </p:txBody>
-      </p:sp>
-      <p:sp>
-        <p:nvSpPr>
-          <p:cNvPr id="7" name="TextBox 6"/>
-          <p:cNvSpPr txBox="1"/>
-          <p:nvPr/>
-        </p:nvSpPr>
-        <p:spPr>
-          <a:xfrm>
-            <a:off x="868680" y="4892040"/>
-            <a:ext cx="10515600" cy="1005840"/>
+              <a:t>▸  3. Confirm the proof's public key matches the cnf.jkt thumbprint in the access token</a:t>
+            </a:r>
+          </a:p>
+        </p:txBody>
+      </p:sp>
+      <p:sp>
+        <p:nvSpPr>
+          <p:cNvPr id="9" name="TextBox 8"/>
+          <p:cNvSpPr txBox="1"/>
+          <p:nvPr/>
+        </p:nvSpPr>
+        <p:spPr>
+          <a:xfrm>
+            <a:off x="502920" y="3767328"/>
+            <a:ext cx="11155680" cy="777240"/>
           </a:xfrm>
           <a:prstGeom prst="rect">
             <a:avLst/>
@@ -6094,26 +7652,26 @@
           <a:p>
             <a:pPr algn="l"/>
             <a:r>
-              <a:rPr sz="1800" b="0">
+              <a:rPr sz="1500" b="0">
                 <a:solidFill>
                   <a:srgbClr val="FFFFFF"/>
                 </a:solidFill>
               </a:rPr>
-              <a:t>• prompt="Walk me through the exact sequence of messages in an OAuth 2.1 authorization code + PKCE flow for an MCP client requesting tokens for an MCP server.</a:t>
-            </a:r>
-          </a:p>
-        </p:txBody>
-      </p:sp>
-      <p:sp>
-        <p:nvSpPr>
-          <p:cNvPr id="8" name="TextBox 7"/>
-          <p:cNvSpPr txBox="1"/>
-          <p:nvPr/>
-        </p:nvSpPr>
-        <p:spPr>
-          <a:xfrm>
-            <a:off x="731520" y="6263640"/>
-            <a:ext cx="10698480" cy="320040"/>
+              <a:t>▸  4. Confirm htm and htu in the proof match the current request's method and URL</a:t>
+            </a:r>
+          </a:p>
+        </p:txBody>
+      </p:sp>
+      <p:sp>
+        <p:nvSpPr>
+          <p:cNvPr id="10" name="TextBox 9"/>
+          <p:cNvSpPr txBox="1"/>
+          <p:nvPr/>
+        </p:nvSpPr>
+        <p:spPr>
+          <a:xfrm>
+            <a:off x="502920" y="4590288"/>
+            <a:ext cx="11155680" cy="777240"/>
           </a:xfrm>
           <a:prstGeom prst="rect">
             <a:avLst/>
@@ -6128,12 +7686,80 @@
           <a:p>
             <a:pPr algn="l"/>
             <a:r>
+              <a:rPr sz="1500" b="0">
+                <a:solidFill>
+                  <a:srgbClr val="FFFFFF"/>
+                </a:solidFill>
+              </a:rPr>
+              <a:t>▸  5. Confirm iat is within a 60-second freshness window (prevents replay)</a:t>
+            </a:r>
+          </a:p>
+        </p:txBody>
+      </p:sp>
+      <p:sp>
+        <p:nvSpPr>
+          <p:cNvPr id="11" name="TextBox 10"/>
+          <p:cNvSpPr txBox="1"/>
+          <p:nvPr/>
+        </p:nvSpPr>
+        <p:spPr>
+          <a:xfrm>
+            <a:off x="457200" y="6492240"/>
+            <a:ext cx="11247120" cy="320040"/>
+          </a:xfrm>
+          <a:prstGeom prst="rect">
+            <a:avLst/>
+          </a:prstGeom>
+          <a:noFill/>
+        </p:spPr>
+        <p:txBody>
+          <a:bodyPr wrap="square">
+            <a:spAutoFit/>
+          </a:bodyPr>
+          <a:lstStyle/>
+          <a:p>
+            <a:pPr algn="l"/>
+            <a:r>
               <a:rPr sz="1000" b="0">
                 <a:solidFill>
                   <a:srgbClr val="A1A1AA"/>
                 </a:solidFill>
               </a:rPr>
               <a:t>academy.kspl.tech | Koenig AI Academy</a:t>
+            </a:r>
+          </a:p>
+        </p:txBody>
+      </p:sp>
+      <p:sp>
+        <p:nvSpPr>
+          <p:cNvPr id="11" name="TextBox 11"/>
+          <p:cNvSpPr txBox="1"/>
+          <p:nvPr/>
+        </p:nvSpPr>
+        <p:spPr>
+          <a:xfrm>
+            <a:off x="502920" y="5413248"/>
+            <a:ext cx="11155680" cy="777240"/>
+          </a:xfrm>
+          <a:prstGeom prst="rect">
+            <a:avLst/>
+          </a:prstGeom>
+          <a:noFill/>
+        </p:spPr>
+        <p:txBody>
+          <a:bodyPr wrap="square">
+            <a:spAutoFit/>
+          </a:bodyPr>
+          <a:lstStyle/>
+          <a:p>
+            <a:pPr algn="l"/>
+            <a:r>
+              <a:rPr sz="1500" b="0">
+                <a:solidFill>
+                  <a:srgbClr val="FFFFFF"/>
+                </a:solidFill>
+              </a:rPr>
+              <a:t>▸  6. Confirm jti hasn't been seen before — reject duplicate JTIs within the max_age window to prevent replay</a:t>
             </a:r>
           </a:p>
         </p:txBody>
@@ -6149,14 +7775,6 @@
 <file path=ppt/slides/slide9.xml><?xml version="1.0" encoding="utf-8"?>
 <p:sld xmlns:a="http://schemas.openxmlformats.org/drawingml/2006/main" xmlns:p="http://schemas.openxmlformats.org/presentationml/2006/main" xmlns:r="http://schemas.openxmlformats.org/officeDocument/2006/relationships">
   <p:cSld>
-    <p:bg>
-      <p:bgPr>
-        <a:solidFill>
-          <a:srgbClr val="18181B"/>
-        </a:solidFill>
-        <a:effectLst/>
-      </p:bgPr>
-    </p:bg>
     <p:spTree>
       <p:nvGrpSpPr>
         <p:cNvPr id="1" name=""/>
@@ -6166,35 +7784,44 @@
       <p:grpSpPr/>
       <p:sp>
         <p:nvSpPr>
-          <p:cNvPr id="2" name="TextBox 1"/>
-          <p:cNvSpPr txBox="1"/>
-          <p:nvPr/>
-        </p:nvSpPr>
-        <p:spPr>
-          <a:xfrm>
-            <a:off x="731520" y="411480"/>
-            <a:ext cx="10789920" cy="822960"/>
-          </a:xfrm>
-          <a:prstGeom prst="rect">
-            <a:avLst/>
-          </a:prstGeom>
-          <a:noFill/>
-        </p:spPr>
-        <p:txBody>
-          <a:bodyPr wrap="square">
-            <a:spAutoFit/>
-          </a:bodyPr>
-          <a:lstStyle/>
-          <a:p>
-            <a:pPr algn="l"/>
-            <a:r>
-              <a:rPr sz="2600" b="1">
-                <a:solidFill>
-                  <a:srgbClr val="FFFFFF"/>
-                </a:solidFill>
-              </a:rPr>
-              <a:t>OAuth 2.1: what changed and why it matters (4)</a:t>
-            </a:r>
+          <p:cNvPr id="2" name="Rectangle 1"/>
+          <p:cNvSpPr/>
+          <p:nvPr/>
+        </p:nvSpPr>
+        <p:spPr>
+          <a:xfrm>
+            <a:off x="0" y="0"/>
+            <a:ext cx="12191695" cy="6858000"/>
+          </a:xfrm>
+          <a:prstGeom prst="rect">
+            <a:avLst/>
+          </a:prstGeom>
+          <a:solidFill>
+            <a:srgbClr val="18181B"/>
+          </a:solidFill>
+          <a:ln>
+            <a:noFill/>
+          </a:ln>
+        </p:spPr>
+        <p:style>
+          <a:lnRef idx="1">
+            <a:schemeClr val="accent1"/>
+          </a:lnRef>
+          <a:fillRef idx="3">
+            <a:schemeClr val="accent1"/>
+          </a:fillRef>
+          <a:effectRef idx="2">
+            <a:schemeClr val="accent1"/>
+          </a:effectRef>
+          <a:fontRef idx="minor">
+            <a:schemeClr val="lt1"/>
+          </a:fontRef>
+        </p:style>
+        <p:txBody>
+          <a:bodyPr rtlCol="0" anchor="ctr"/>
+          <a:lstStyle/>
+          <a:p>
+            <a:pPr algn="ctr"/>
           </a:p>
         </p:txBody>
       </p:sp>
@@ -6206,8 +7833,85 @@
         </p:nvSpPr>
         <p:spPr>
           <a:xfrm>
-            <a:off x="731520" y="1325880"/>
-            <a:ext cx="10789920" cy="27432"/>
+            <a:off x="0" y="0"/>
+            <a:ext cx="12191695" cy="54864"/>
+          </a:xfrm>
+          <a:prstGeom prst="rect">
+            <a:avLst/>
+          </a:prstGeom>
+          <a:solidFill>
+            <a:srgbClr val="6366F1"/>
+          </a:solidFill>
+          <a:ln>
+            <a:noFill/>
+          </a:ln>
+        </p:spPr>
+        <p:style>
+          <a:lnRef idx="1">
+            <a:schemeClr val="accent1"/>
+          </a:lnRef>
+          <a:fillRef idx="3">
+            <a:schemeClr val="accent1"/>
+          </a:fillRef>
+          <a:effectRef idx="2">
+            <a:schemeClr val="accent1"/>
+          </a:effectRef>
+          <a:fontRef idx="minor">
+            <a:schemeClr val="lt1"/>
+          </a:fontRef>
+        </p:style>
+        <p:txBody>
+          <a:bodyPr rtlCol="0" anchor="ctr"/>
+          <a:lstStyle/>
+          <a:p>
+            <a:pPr algn="ctr"/>
+          </a:p>
+        </p:txBody>
+      </p:sp>
+      <p:sp>
+        <p:nvSpPr>
+          <p:cNvPr id="4" name="TextBox 3"/>
+          <p:cNvSpPr txBox="1"/>
+          <p:nvPr/>
+        </p:nvSpPr>
+        <p:spPr>
+          <a:xfrm>
+            <a:off x="457200" y="164592"/>
+            <a:ext cx="11247120" cy="868680"/>
+          </a:xfrm>
+          <a:prstGeom prst="rect">
+            <a:avLst/>
+          </a:prstGeom>
+          <a:noFill/>
+        </p:spPr>
+        <p:txBody>
+          <a:bodyPr wrap="square">
+            <a:spAutoFit/>
+          </a:bodyPr>
+          <a:lstStyle/>
+          <a:p>
+            <a:pPr algn="l"/>
+            <a:r>
+              <a:rPr sz="2800" b="1">
+                <a:solidFill>
+                  <a:srgbClr val="FFFFFF"/>
+                </a:solidFill>
+              </a:rPr>
+              <a:t>The .well-known/oauth-authorization-server Endpoint</a:t>
+            </a:r>
+          </a:p>
+        </p:txBody>
+      </p:sp>
+      <p:sp>
+        <p:nvSpPr>
+          <p:cNvPr id="5" name="Rectangle 4"/>
+          <p:cNvSpPr/>
+          <p:nvPr/>
+        </p:nvSpPr>
+        <p:spPr>
+          <a:xfrm>
+            <a:off x="457200" y="1143000"/>
+            <a:ext cx="11247120" cy="27432"/>
           </a:xfrm>
           <a:prstGeom prst="rect">
             <a:avLst/>
@@ -6243,14 +7947,14 @@
       </p:sp>
       <p:sp>
         <p:nvSpPr>
-          <p:cNvPr id="4" name="TextBox 3"/>
-          <p:cNvSpPr txBox="1"/>
-          <p:nvPr/>
-        </p:nvSpPr>
-        <p:spPr>
-          <a:xfrm>
-            <a:off x="868680" y="1600200"/>
-            <a:ext cx="10515600" cy="1005840"/>
+          <p:cNvPr id="6" name="TextBox 5"/>
+          <p:cNvSpPr txBox="1"/>
+          <p:nvPr/>
+        </p:nvSpPr>
+        <p:spPr>
+          <a:xfrm>
+            <a:off x="502920" y="1298448"/>
+            <a:ext cx="11155680" cy="777240"/>
           </a:xfrm>
           <a:prstGeom prst="rect">
             <a:avLst/>
@@ -6265,26 +7969,26 @@
           <a:p>
             <a:pPr algn="l"/>
             <a:r>
-              <a:rPr sz="1800" b="0">
+              <a:rPr sz="1500" b="0">
                 <a:solidFill>
                   <a:srgbClr val="FFFFFF"/>
                 </a:solidFill>
               </a:rPr>
-              <a:t>• expectedOutput="The expert covers: (1) The client generates a cryptographically random code_verifier (43-128 URL-safe chars), then computes code_challenge = BAS</a:t>
-            </a:r>
-          </a:p>
-        </p:txBody>
-      </p:sp>
-      <p:sp>
-        <p:nvSpPr>
-          <p:cNvPr id="5" name="TextBox 4"/>
-          <p:cNvSpPr txBox="1"/>
-          <p:nvPr/>
-        </p:nvSpPr>
-        <p:spPr>
-          <a:xfrm>
-            <a:off x="868680" y="2697480"/>
-            <a:ext cx="10515600" cy="1005840"/>
+              <a:t>▸  MCP auth spec requires all remote servers to expose RFC 8414 discovery metadata</a:t>
+            </a:r>
+          </a:p>
+        </p:txBody>
+      </p:sp>
+      <p:sp>
+        <p:nvSpPr>
+          <p:cNvPr id="7" name="TextBox 6"/>
+          <p:cNvSpPr txBox="1"/>
+          <p:nvPr/>
+        </p:nvSpPr>
+        <p:spPr>
+          <a:xfrm>
+            <a:off x="502920" y="2121408"/>
+            <a:ext cx="11155680" cy="777240"/>
           </a:xfrm>
           <a:prstGeom prst="rect">
             <a:avLst/>
@@ -6299,26 +8003,26 @@
           <a:p>
             <a:pPr algn="l"/>
             <a:r>
-              <a:rPr sz="1800" b="0">
+              <a:rPr sz="1500" b="0">
                 <a:solidFill>
                   <a:srgbClr val="FFFFFF"/>
                 </a:solidFill>
               </a:rPr>
-              <a:t>• question="An MCP client sends an authorization request to your OAuth 2.1 authorization server but omits the code_challenge parameter.</a:t>
-            </a:r>
-          </a:p>
-        </p:txBody>
-      </p:sp>
-      <p:sp>
-        <p:nvSpPr>
-          <p:cNvPr id="6" name="TextBox 5"/>
-          <p:cNvSpPr txBox="1"/>
-          <p:nvPr/>
-        </p:nvSpPr>
-        <p:spPr>
-          <a:xfrm>
-            <a:off x="868680" y="3794760"/>
-            <a:ext cx="10515600" cy="1005840"/>
+              <a:t>▸  Declares authorization_endpoint, token_endpoint, jwks_uri, and dpop_signing_alg_values_supported</a:t>
+            </a:r>
+          </a:p>
+        </p:txBody>
+      </p:sp>
+      <p:sp>
+        <p:nvSpPr>
+          <p:cNvPr id="8" name="TextBox 7"/>
+          <p:cNvSpPr txBox="1"/>
+          <p:nvPr/>
+        </p:nvSpPr>
+        <p:spPr>
+          <a:xfrm>
+            <a:off x="502920" y="2944368"/>
+            <a:ext cx="11155680" cy="777240"/>
           </a:xfrm>
           <a:prstGeom prst="rect">
             <a:avLst/>
@@ -6333,26 +8037,26 @@
           <a:p>
             <a:pPr algn="l"/>
             <a:r>
-              <a:rPr sz="1800" b="0">
+              <a:rPr sz="1500" b="0">
                 <a:solidFill>
                   <a:srgbClr val="FFFFFF"/>
                 </a:solidFill>
               </a:rPr>
-              <a:t>• "Accept it — PKCE is only mandatory for public clients (mobile/SPA), not confidential clients",</a:t>
-            </a:r>
-          </a:p>
-        </p:txBody>
-      </p:sp>
-      <p:sp>
-        <p:nvSpPr>
-          <p:cNvPr id="7" name="TextBox 6"/>
-          <p:cNvSpPr txBox="1"/>
-          <p:nvPr/>
-        </p:nvSpPr>
-        <p:spPr>
-          <a:xfrm>
-            <a:off x="868680" y="4892040"/>
-            <a:ext cx="10515600" cy="1005840"/>
+              <a:t>▸  code_challenge_methods_supported must list S256 only — plain is insecure</a:t>
+            </a:r>
+          </a:p>
+        </p:txBody>
+      </p:sp>
+      <p:sp>
+        <p:nvSpPr>
+          <p:cNvPr id="9" name="TextBox 8"/>
+          <p:cNvSpPr txBox="1"/>
+          <p:nvPr/>
+        </p:nvSpPr>
+        <p:spPr>
+          <a:xfrm>
+            <a:off x="502920" y="3767328"/>
+            <a:ext cx="11155680" cy="777240"/>
           </a:xfrm>
           <a:prstGeom prst="rect">
             <a:avLst/>
@@ -6367,26 +8071,60 @@
           <a:p>
             <a:pPr algn="l"/>
             <a:r>
-              <a:rPr sz="1800" b="0">
+              <a:rPr sz="1500" b="0">
                 <a:solidFill>
                   <a:srgbClr val="FFFFFF"/>
                 </a:solidFill>
               </a:rPr>
-              <a:t>• "Reject the authorization request — PKCE with S256 is mandatory for ALL authorization code grants in OAuth 2.1",</a:t>
-            </a:r>
-          </a:p>
-        </p:txBody>
-      </p:sp>
-      <p:sp>
-        <p:nvSpPr>
-          <p:cNvPr id="8" name="TextBox 7"/>
-          <p:cNvSpPr txBox="1"/>
-          <p:nvPr/>
-        </p:nvSpPr>
-        <p:spPr>
-          <a:xfrm>
-            <a:off x="731520" y="6263640"/>
-            <a:ext cx="10698480" cy="320040"/>
+              <a:t>▸  dpop_signing_alg_values_supported enables progressive DPoP adoption alongside legacy Bearer clients</a:t>
+            </a:r>
+          </a:p>
+        </p:txBody>
+      </p:sp>
+      <p:sp>
+        <p:nvSpPr>
+          <p:cNvPr id="10" name="TextBox 9"/>
+          <p:cNvSpPr txBox="1"/>
+          <p:nvPr/>
+        </p:nvSpPr>
+        <p:spPr>
+          <a:xfrm>
+            <a:off x="502920" y="4590288"/>
+            <a:ext cx="11155680" cy="777240"/>
+          </a:xfrm>
+          <a:prstGeom prst="rect">
+            <a:avLst/>
+          </a:prstGeom>
+          <a:noFill/>
+        </p:spPr>
+        <p:txBody>
+          <a:bodyPr wrap="square">
+            <a:spAutoFit/>
+          </a:bodyPr>
+          <a:lstStyle/>
+          <a:p>
+            <a:pPr algn="l"/>
+            <a:r>
+              <a:rPr sz="1500" b="0">
+                <a:solidFill>
+                  <a:srgbClr val="FFFFFF"/>
+                </a:solidFill>
+              </a:rPr>
+              <a:t>▸  Declaring DPoP support is zero-cost; omitting it forces SEP-1932-compliant clients to fall back or refuse</a:t>
+            </a:r>
+          </a:p>
+        </p:txBody>
+      </p:sp>
+      <p:sp>
+        <p:nvSpPr>
+          <p:cNvPr id="11" name="TextBox 10"/>
+          <p:cNvSpPr txBox="1"/>
+          <p:nvPr/>
+        </p:nvSpPr>
+        <p:spPr>
+          <a:xfrm>
+            <a:off x="457200" y="6492240"/>
+            <a:ext cx="11247120" cy="320040"/>
           </a:xfrm>
           <a:prstGeom prst="rect">
             <a:avLst/>
